--- a/slides/modules/m12-developer-hub-golden-paths.pptx
+++ b/slides/modules/m12-developer-hub-golden-paths.pptx
@@ -12,6 +12,9 @@
     <p:sldId id="260" r:id="rId12"/>
     <p:sldId id="261" r:id="rId13"/>
     <p:sldId id="262" r:id="rId14"/>
+    <p:sldId id="263" r:id="rId15"/>
+    <p:sldId id="264" r:id="rId16"/>
+    <p:sldId id="265" r:id="rId17"/>
   </p:sldIdLst>
   <p:sldSz cx="12191695" cy="6858000" type="screen4x3"/>
   <p:notesSz cx="6858000" cy="9144000"/>
@@ -859,6 +862,216 @@
           <a:p>
             <a:r>
               <a:t>Land the transfer and stay honest. In your org: how does a new service actually get created, and who has to be in the room — is it scaffolded from a template the platform team owns, or copied from an existing repo and fixed up later? When someone asks who owns a service and what depends on it, is that a query against a live map or an archaeology project? And which of your standards are enforced by construction versus found missing in an audit? Then the credibility close on restraint. Do not stand up a portal you will not feed — a catalog nobody maintains rots into the stale wiki it replaced, now with more to run. Do not let golden paths sprawl into the copy-and-drift problem one level up. Do not turn the paved road into a cage teams route around. And do not platform-engineer every workflow — templatize the common path, leave the genuine one-offs alone. The portal is production software; it earns its cost when cognitive load is the real problem, not before.</a:t>
+            </a:r>
+          </a:p>
+        </p:txBody>
+      </p:sp>
+      <p:sp>
+        <p:nvSpPr>
+          <p:cNvPr id="4" name="Slide Number Placeholder 3"/>
+          <p:cNvSpPr>
+            <a:spLocks noGrp="1"/>
+          </p:cNvSpPr>
+          <p:nvPr>
+            <p:ph type="sldNum" idx="5" sz="quarter"/>
+          </p:nvPr>
+        </p:nvSpPr>
+        <p:spPr/>
+      </p:sp>
+    </p:spTree>
+  </p:cSld>
+  <p:clrMapOvr>
+    <a:masterClrMapping/>
+  </p:clrMapOvr>
+</p:notes>
+</file>
+
+<file path=ppt/notesSlides/notesSlide7.xml><?xml version="1.0" encoding="utf-8"?>
+<p:notes xmlns:a="http://schemas.openxmlformats.org/drawingml/2006/main" xmlns:p="http://schemas.openxmlformats.org/presentationml/2006/main" xmlns:r="http://schemas.openxmlformats.org/officeDocument/2006/relationships">
+  <p:cSld>
+    <p:spTree>
+      <p:nvGrpSpPr>
+        <p:cNvPr id="1" name=""/>
+        <p:cNvGrpSpPr/>
+        <p:nvPr/>
+      </p:nvGrpSpPr>
+      <p:grpSpPr>
+        <a:xfrm>
+          <a:off x="0" y="0"/>
+          <a:ext cx="0" cy="0"/>
+          <a:chOff x="0" y="0"/>
+          <a:chExt cx="0" cy="0"/>
+        </a:xfrm>
+      </p:grpSpPr>
+      <p:sp>
+        <p:nvSpPr>
+          <p:cNvPr id="2" name="Slide Image Placeholder 1"/>
+          <p:cNvSpPr>
+            <a:spLocks noGrp="1"/>
+          </p:cNvSpPr>
+          <p:nvPr>
+            <p:ph type="sldImg" idx="2"/>
+          </p:nvPr>
+        </p:nvSpPr>
+        <p:spPr/>
+      </p:sp>
+      <p:sp>
+        <p:nvSpPr>
+          <p:cNvPr id="3" name="Notes Placeholder 2"/>
+          <p:cNvSpPr>
+            <a:spLocks noGrp="1"/>
+          </p:cNvSpPr>
+          <p:nvPr>
+            <p:ph type="body" idx="3" sz="quarter"/>
+          </p:nvPr>
+        </p:nvSpPr>
+        <p:spPr/>
+        <p:txBody>
+          <a:bodyPr/>
+          <a:lstStyle/>
+          <a:p>
+            <a:r>
+              <a:t>Concept diagram: Catalog model.</a:t>
+            </a:r>
+          </a:p>
+        </p:txBody>
+      </p:sp>
+      <p:sp>
+        <p:nvSpPr>
+          <p:cNvPr id="4" name="Slide Number Placeholder 3"/>
+          <p:cNvSpPr>
+            <a:spLocks noGrp="1"/>
+          </p:cNvSpPr>
+          <p:nvPr>
+            <p:ph type="sldNum" idx="5" sz="quarter"/>
+          </p:nvPr>
+        </p:nvSpPr>
+        <p:spPr/>
+      </p:sp>
+    </p:spTree>
+  </p:cSld>
+  <p:clrMapOvr>
+    <a:masterClrMapping/>
+  </p:clrMapOvr>
+</p:notes>
+</file>
+
+<file path=ppt/notesSlides/notesSlide8.xml><?xml version="1.0" encoding="utf-8"?>
+<p:notes xmlns:a="http://schemas.openxmlformats.org/drawingml/2006/main" xmlns:p="http://schemas.openxmlformats.org/presentationml/2006/main" xmlns:r="http://schemas.openxmlformats.org/officeDocument/2006/relationships">
+  <p:cSld>
+    <p:spTree>
+      <p:nvGrpSpPr>
+        <p:cNvPr id="1" name=""/>
+        <p:cNvGrpSpPr/>
+        <p:nvPr/>
+      </p:nvGrpSpPr>
+      <p:grpSpPr>
+        <a:xfrm>
+          <a:off x="0" y="0"/>
+          <a:ext cx="0" cy="0"/>
+          <a:chOff x="0" y="0"/>
+          <a:chExt cx="0" cy="0"/>
+        </a:xfrm>
+      </p:grpSpPr>
+      <p:sp>
+        <p:nvSpPr>
+          <p:cNvPr id="2" name="Slide Image Placeholder 1"/>
+          <p:cNvSpPr>
+            <a:spLocks noGrp="1"/>
+          </p:cNvSpPr>
+          <p:nvPr>
+            <p:ph type="sldImg" idx="2"/>
+          </p:nvPr>
+        </p:nvSpPr>
+        <p:spPr/>
+      </p:sp>
+      <p:sp>
+        <p:nvSpPr>
+          <p:cNvPr id="3" name="Notes Placeholder 2"/>
+          <p:cNvSpPr>
+            <a:spLocks noGrp="1"/>
+          </p:cNvSpPr>
+          <p:nvPr>
+            <p:ph type="body" idx="3" sz="quarter"/>
+          </p:nvPr>
+        </p:nvSpPr>
+        <p:spPr/>
+        <p:txBody>
+          <a:bodyPr/>
+          <a:lstStyle/>
+          <a:p>
+            <a:r>
+              <a:t>Concept diagram: Golden path flow.</a:t>
+            </a:r>
+          </a:p>
+        </p:txBody>
+      </p:sp>
+      <p:sp>
+        <p:nvSpPr>
+          <p:cNvPr id="4" name="Slide Number Placeholder 3"/>
+          <p:cNvSpPr>
+            <a:spLocks noGrp="1"/>
+          </p:cNvSpPr>
+          <p:nvPr>
+            <p:ph type="sldNum" idx="5" sz="quarter"/>
+          </p:nvPr>
+        </p:nvSpPr>
+        <p:spPr/>
+      </p:sp>
+    </p:spTree>
+  </p:cSld>
+  <p:clrMapOvr>
+    <a:masterClrMapping/>
+  </p:clrMapOvr>
+</p:notes>
+</file>
+
+<file path=ppt/notesSlides/notesSlide9.xml><?xml version="1.0" encoding="utf-8"?>
+<p:notes xmlns:a="http://schemas.openxmlformats.org/drawingml/2006/main" xmlns:p="http://schemas.openxmlformats.org/presentationml/2006/main" xmlns:r="http://schemas.openxmlformats.org/officeDocument/2006/relationships">
+  <p:cSld>
+    <p:spTree>
+      <p:nvGrpSpPr>
+        <p:cNvPr id="1" name=""/>
+        <p:cNvGrpSpPr/>
+        <p:nvPr/>
+      </p:nvGrpSpPr>
+      <p:grpSpPr>
+        <a:xfrm>
+          <a:off x="0" y="0"/>
+          <a:ext cx="0" cy="0"/>
+          <a:chOff x="0" y="0"/>
+          <a:chExt cx="0" cy="0"/>
+        </a:xfrm>
+      </p:grpSpPr>
+      <p:sp>
+        <p:nvSpPr>
+          <p:cNvPr id="2" name="Slide Image Placeholder 1"/>
+          <p:cNvSpPr>
+            <a:spLocks noGrp="1"/>
+          </p:cNvSpPr>
+          <p:nvPr>
+            <p:ph type="sldImg" idx="2"/>
+          </p:nvPr>
+        </p:nvSpPr>
+        <p:spPr/>
+      </p:sp>
+      <p:sp>
+        <p:nvSpPr>
+          <p:cNvPr id="3" name="Notes Placeholder 2"/>
+          <p:cNvSpPr>
+            <a:spLocks noGrp="1"/>
+          </p:cNvSpPr>
+          <p:nvPr>
+            <p:ph type="body" idx="3" sz="quarter"/>
+          </p:nvPr>
+        </p:nvSpPr>
+        <p:spPr/>
+        <p:txBody>
+          <a:bodyPr/>
+          <a:lstStyle/>
+          <a:p>
+            <a:r>
+              <a:t>Concept diagram: What you built.</a:t>
             </a:r>
           </a:p>
         </p:txBody>
@@ -4067,6 +4280,372 @@
 </p:sld>
 </file>
 
+<file path=ppt/slides/slide10.xml><?xml version="1.0" encoding="utf-8"?>
+<p:sld xmlns:a="http://schemas.openxmlformats.org/drawingml/2006/main" xmlns:p="http://schemas.openxmlformats.org/presentationml/2006/main" xmlns:r="http://schemas.openxmlformats.org/officeDocument/2006/relationships">
+  <p:cSld>
+    <p:spTree>
+      <p:nvGrpSpPr>
+        <p:cNvPr id="1" name=""/>
+        <p:cNvGrpSpPr/>
+        <p:nvPr/>
+      </p:nvGrpSpPr>
+      <p:grpSpPr/>
+      <p:pic>
+        <p:nvPicPr>
+          <p:cNvPr id="2" name="Picture 1" descr="redhat_logo.jpg"/>
+          <p:cNvPicPr>
+            <a:picLocks noChangeAspect="1"/>
+          </p:cNvPicPr>
+          <p:nvPr/>
+        </p:nvPicPr>
+        <p:blipFill>
+          <a:blip r:embed="rId2"/>
+          <a:stretch>
+            <a:fillRect/>
+          </a:stretch>
+        </p:blipFill>
+        <p:spPr>
+          <a:xfrm>
+            <a:off x="10326319" y="475488"/>
+            <a:ext cx="1024128" cy="242248"/>
+          </a:xfrm>
+          <a:prstGeom prst="rect">
+            <a:avLst/>
+          </a:prstGeom>
+        </p:spPr>
+      </p:pic>
+      <p:sp>
+        <p:nvSpPr>
+          <p:cNvPr id="3" name="TextBox 2"/>
+          <p:cNvSpPr txBox="1"/>
+          <p:nvPr/>
+        </p:nvSpPr>
+        <p:spPr>
+          <a:xfrm>
+            <a:off x="841248" y="548640"/>
+            <a:ext cx="8595360" cy="274320"/>
+          </a:xfrm>
+          <a:prstGeom prst="rect">
+            <a:avLst/>
+          </a:prstGeom>
+          <a:noFill/>
+        </p:spPr>
+        <p:txBody>
+          <a:bodyPr wrap="square" anchor="t" lIns="0" rIns="0" tIns="0" bIns="0">
+            <a:spAutoFit/>
+          </a:bodyPr>
+          <a:lstStyle/>
+          <a:p>
+            <a:pPr algn="l">
+              <a:lnSpc>
+                <a:spcPct val="106000"/>
+              </a:lnSpc>
+              <a:spcBef>
+                <a:spcPts val="0"/>
+              </a:spcBef>
+              <a:spcAft>
+                <a:spcPts val="0"/>
+              </a:spcAft>
+            </a:pPr>
+            <a:r>
+              <a:rPr sz="1250" b="1" spc="220">
+                <a:solidFill>
+                  <a:srgbClr val="EE0000"/>
+                </a:solidFill>
+                <a:latin typeface="Red Hat Display"/>
+              </a:rPr>
+              <a:t>M12 · DEVELOPER HUB &amp; GOLDEN PATHS</a:t>
+            </a:r>
+          </a:p>
+        </p:txBody>
+      </p:sp>
+      <p:sp>
+        <p:nvSpPr>
+          <p:cNvPr id="4" name="TextBox 3"/>
+          <p:cNvSpPr txBox="1"/>
+          <p:nvPr/>
+        </p:nvSpPr>
+        <p:spPr>
+          <a:xfrm>
+            <a:off x="841248" y="877824"/>
+            <a:ext cx="10515600" cy="548640"/>
+          </a:xfrm>
+          <a:prstGeom prst="rect">
+            <a:avLst/>
+          </a:prstGeom>
+          <a:noFill/>
+        </p:spPr>
+        <p:txBody>
+          <a:bodyPr wrap="none" anchor="t" lIns="0" rIns="0" tIns="0" bIns="0">
+            <a:spAutoFit/>
+          </a:bodyPr>
+          <a:lstStyle/>
+          <a:p>
+            <a:pPr algn="l">
+              <a:lnSpc>
+                <a:spcPct val="100000"/>
+              </a:lnSpc>
+              <a:spcBef>
+                <a:spcPts val="0"/>
+              </a:spcBef>
+              <a:spcAft>
+                <a:spcPts val="0"/>
+              </a:spcAft>
+            </a:pPr>
+            <a:r>
+              <a:rPr sz="2500" b="1">
+                <a:solidFill>
+                  <a:srgbClr val="1A1A1A"/>
+                </a:solidFill>
+                <a:latin typeface="Red Hat Display"/>
+              </a:rPr>
+              <a:t>What you built</a:t>
+            </a:r>
+          </a:p>
+        </p:txBody>
+      </p:sp>
+      <p:cxnSp>
+        <p:nvCxnSpPr>
+          <p:cNvPr id="5" name="Connector 4"/>
+          <p:cNvCxnSpPr/>
+          <p:nvPr/>
+        </p:nvCxnSpPr>
+        <p:spPr>
+          <a:xfrm>
+            <a:off x="841248" y="1554480"/>
+            <a:ext cx="1371600" cy="0"/>
+          </a:xfrm>
+          <a:prstGeom prst="bentConnector3">
+            <a:avLst/>
+          </a:prstGeom>
+          <a:ln w="31750">
+            <a:solidFill>
+              <a:srgbClr val="EE0000"/>
+            </a:solidFill>
+          </a:ln>
+          <a:effectLst/>
+        </p:spPr>
+        <p:style>
+          <a:lnRef idx="2">
+            <a:schemeClr val="accent1"/>
+          </a:lnRef>
+          <a:fillRef idx="0">
+            <a:schemeClr val="accent1"/>
+          </a:fillRef>
+          <a:effectRef idx="1">
+            <a:schemeClr val="accent1"/>
+          </a:effectRef>
+          <a:fontRef idx="minor">
+            <a:schemeClr val="tx1"/>
+          </a:fontRef>
+        </p:style>
+      </p:cxnSp>
+      <p:sp>
+        <p:nvSpPr>
+          <p:cNvPr id="6" name="Rounded Rectangle 5"/>
+          <p:cNvSpPr/>
+          <p:nvPr/>
+        </p:nvSpPr>
+        <p:spPr>
+          <a:xfrm>
+            <a:off x="841248" y="2331720"/>
+            <a:ext cx="10509199" cy="3794760"/>
+          </a:xfrm>
+          <a:prstGeom prst="roundRect">
+            <a:avLst>
+              <a:gd name="adj" fmla="val 4000"/>
+            </a:avLst>
+          </a:prstGeom>
+          <a:solidFill>
+            <a:srgbClr val="FFFFFF"/>
+          </a:solidFill>
+          <a:ln w="15240">
+            <a:solidFill>
+              <a:srgbClr val="DDE1E6"/>
+            </a:solidFill>
+          </a:ln>
+          <a:effectLst/>
+        </p:spPr>
+        <p:style>
+          <a:lnRef idx="1">
+            <a:schemeClr val="accent1"/>
+          </a:lnRef>
+          <a:fillRef idx="3">
+            <a:schemeClr val="accent1"/>
+          </a:fillRef>
+          <a:effectRef idx="2">
+            <a:schemeClr val="accent1"/>
+          </a:effectRef>
+          <a:fontRef idx="minor">
+            <a:schemeClr val="lt1"/>
+          </a:fontRef>
+        </p:style>
+        <p:txBody>
+          <a:bodyPr rtlCol="0" anchor="ctr"/>
+          <a:lstStyle/>
+          <a:p>
+            <a:pPr algn="ctr"/>
+          </a:p>
+        </p:txBody>
+      </p:sp>
+      <p:pic>
+        <p:nvPicPr>
+          <p:cNvPr id="7" name="Picture 6" descr="05-what-you-built.png"/>
+          <p:cNvPicPr>
+            <a:picLocks noChangeAspect="1"/>
+          </p:cNvPicPr>
+          <p:nvPr/>
+        </p:nvPicPr>
+        <p:blipFill>
+          <a:blip r:embed="rId3"/>
+          <a:stretch>
+            <a:fillRect/>
+          </a:stretch>
+        </p:blipFill>
+        <p:spPr>
+          <a:xfrm>
+            <a:off x="1042416" y="3234205"/>
+            <a:ext cx="10106863" cy="1989788"/>
+          </a:xfrm>
+          <a:prstGeom prst="rect">
+            <a:avLst/>
+          </a:prstGeom>
+        </p:spPr>
+      </p:pic>
+      <p:cxnSp>
+        <p:nvCxnSpPr>
+          <p:cNvPr id="8" name="Connector 7"/>
+          <p:cNvCxnSpPr/>
+          <p:nvPr/>
+        </p:nvCxnSpPr>
+        <p:spPr>
+          <a:xfrm>
+            <a:off x="841248" y="6437376"/>
+            <a:ext cx="10509199" cy="0"/>
+          </a:xfrm>
+          <a:prstGeom prst="bentConnector3">
+            <a:avLst/>
+          </a:prstGeom>
+          <a:ln w="12700">
+            <a:solidFill>
+              <a:srgbClr val="DDE1E6"/>
+            </a:solidFill>
+          </a:ln>
+          <a:effectLst/>
+        </p:spPr>
+        <p:style>
+          <a:lnRef idx="2">
+            <a:schemeClr val="accent1"/>
+          </a:lnRef>
+          <a:fillRef idx="0">
+            <a:schemeClr val="accent1"/>
+          </a:fillRef>
+          <a:effectRef idx="1">
+            <a:schemeClr val="accent1"/>
+          </a:effectRef>
+          <a:fontRef idx="minor">
+            <a:schemeClr val="tx1"/>
+          </a:fontRef>
+        </p:style>
+      </p:cxnSp>
+      <p:sp>
+        <p:nvSpPr>
+          <p:cNvPr id="9" name="TextBox 8"/>
+          <p:cNvSpPr txBox="1"/>
+          <p:nvPr/>
+        </p:nvSpPr>
+        <p:spPr>
+          <a:xfrm>
+            <a:off x="841248" y="6473952"/>
+            <a:ext cx="7315200" cy="274320"/>
+          </a:xfrm>
+          <a:prstGeom prst="rect">
+            <a:avLst/>
+          </a:prstGeom>
+          <a:noFill/>
+        </p:spPr>
+        <p:txBody>
+          <a:bodyPr wrap="square" anchor="t" lIns="0" rIns="0" tIns="0" bIns="0">
+            <a:spAutoFit/>
+          </a:bodyPr>
+          <a:lstStyle/>
+          <a:p>
+            <a:pPr algn="l">
+              <a:lnSpc>
+                <a:spcPct val="106000"/>
+              </a:lnSpc>
+              <a:spcBef>
+                <a:spcPts val="0"/>
+              </a:spcBef>
+              <a:spcAft>
+                <a:spcPts val="0"/>
+              </a:spcAft>
+            </a:pPr>
+            <a:r>
+              <a:rPr sz="950" b="0">
+                <a:solidFill>
+                  <a:srgbClr val="8A9099"/>
+                </a:solidFill>
+                <a:latin typeface="Red Hat Text"/>
+              </a:rPr>
+              <a:t>CONFIDENTIAL</a:t>
+            </a:r>
+          </a:p>
+        </p:txBody>
+      </p:sp>
+      <p:sp>
+        <p:nvSpPr>
+          <p:cNvPr id="10" name="TextBox 9"/>
+          <p:cNvSpPr txBox="1"/>
+          <p:nvPr/>
+        </p:nvSpPr>
+        <p:spPr>
+          <a:xfrm>
+            <a:off x="10801807" y="6473952"/>
+            <a:ext cx="548640" cy="274320"/>
+          </a:xfrm>
+          <a:prstGeom prst="rect">
+            <a:avLst/>
+          </a:prstGeom>
+          <a:noFill/>
+        </p:spPr>
+        <p:txBody>
+          <a:bodyPr wrap="square" anchor="t" lIns="0" rIns="0" tIns="0" bIns="0">
+            <a:spAutoFit/>
+          </a:bodyPr>
+          <a:lstStyle/>
+          <a:p>
+            <a:pPr algn="r">
+              <a:lnSpc>
+                <a:spcPct val="106000"/>
+              </a:lnSpc>
+              <a:spcBef>
+                <a:spcPts val="0"/>
+              </a:spcBef>
+              <a:spcAft>
+                <a:spcPts val="0"/>
+              </a:spcAft>
+            </a:pPr>
+            <a:r>
+              <a:rPr sz="950" b="0">
+                <a:solidFill>
+                  <a:srgbClr val="8A9099"/>
+                </a:solidFill>
+                <a:latin typeface="Red Hat Text"/>
+              </a:rPr>
+              <a:t>9</a:t>
+            </a:r>
+          </a:p>
+        </p:txBody>
+      </p:sp>
+    </p:spTree>
+  </p:cSld>
+  <p:clrMapOvr>
+    <a:masterClrMapping/>
+  </p:clrMapOvr>
+</p:sld>
+</file>
+
 <file path=ppt/slides/slide2.xml><?xml version="1.0" encoding="utf-8"?>
 <p:sld xmlns:a="http://schemas.openxmlformats.org/drawingml/2006/main" xmlns:p="http://schemas.openxmlformats.org/presentationml/2006/main" xmlns:r="http://schemas.openxmlformats.org/officeDocument/2006/relationships">
   <p:cSld>
@@ -4236,11 +4815,11 @@
         <p:spPr>
           <a:xfrm>
             <a:off x="841248" y="2395728"/>
-            <a:ext cx="5715000" cy="530352"/>
+            <a:ext cx="5138928" cy="786384"/>
           </a:xfrm>
           <a:prstGeom prst="roundRect">
             <a:avLst>
-              <a:gd name="adj" fmla="val 6000"/>
+              <a:gd name="adj" fmla="val 7000"/>
             </a:avLst>
           </a:prstGeom>
           <a:solidFill>
@@ -4275,9 +4854,55 @@
           </a:p>
         </p:txBody>
       </p:sp>
+      <p:sp>
+        <p:nvSpPr>
+          <p:cNvPr id="7" name="Rounded Rectangle 6"/>
+          <p:cNvSpPr/>
+          <p:nvPr/>
+        </p:nvSpPr>
+        <p:spPr>
+          <a:xfrm>
+            <a:off x="987552" y="2532888"/>
+            <a:ext cx="512064" cy="512064"/>
+          </a:xfrm>
+          <a:prstGeom prst="roundRect">
+            <a:avLst>
+              <a:gd name="adj" fmla="val 26000"/>
+            </a:avLst>
+          </a:prstGeom>
+          <a:solidFill>
+            <a:srgbClr val="EE0000"/>
+          </a:solidFill>
+          <a:ln>
+            <a:noFill/>
+          </a:ln>
+          <a:effectLst/>
+        </p:spPr>
+        <p:style>
+          <a:lnRef idx="1">
+            <a:schemeClr val="accent1"/>
+          </a:lnRef>
+          <a:fillRef idx="3">
+            <a:schemeClr val="accent1"/>
+          </a:fillRef>
+          <a:effectRef idx="2">
+            <a:schemeClr val="accent1"/>
+          </a:effectRef>
+          <a:fontRef idx="minor">
+            <a:schemeClr val="lt1"/>
+          </a:fontRef>
+        </p:style>
+        <p:txBody>
+          <a:bodyPr rtlCol="0" anchor="ctr"/>
+          <a:lstStyle/>
+          <a:p>
+            <a:pPr algn="ctr"/>
+          </a:p>
+        </p:txBody>
+      </p:sp>
       <p:pic>
         <p:nvPicPr>
-          <p:cNvPr id="7" name="Picture 6" descr="check_steel.png"/>
+          <p:cNvPr id="8" name="Picture 7" descr="check_white.png"/>
           <p:cNvPicPr>
             <a:picLocks noChangeAspect="1"/>
           </p:cNvPicPr>
@@ -4291,8 +4916,8 @@
         </p:blipFill>
         <p:spPr>
           <a:xfrm>
-            <a:off x="987552" y="2542032"/>
-            <a:ext cx="237744" cy="237744"/>
+            <a:off x="1110447" y="2655783"/>
+            <a:ext cx="266273" cy="266273"/>
           </a:xfrm>
           <a:prstGeom prst="rect">
             <a:avLst/>
@@ -4301,14 +4926,14 @@
       </p:pic>
       <p:sp>
         <p:nvSpPr>
-          <p:cNvPr id="8" name="TextBox 7"/>
+          <p:cNvPr id="9" name="TextBox 8"/>
           <p:cNvSpPr txBox="1"/>
           <p:nvPr/>
         </p:nvSpPr>
         <p:spPr>
           <a:xfrm>
-            <a:off x="1353312" y="2395728"/>
-            <a:ext cx="5029200" cy="530352"/>
+            <a:off x="1627632" y="2395728"/>
+            <a:ext cx="4206240" cy="786384"/>
           </a:xfrm>
           <a:prstGeom prst="rect">
             <a:avLst/>
@@ -4333,7 +4958,7 @@
               </a:spcAft>
             </a:pPr>
             <a:r>
-              <a:rPr sz="1200" b="0">
+              <a:rPr sz="1150" b="0">
                 <a:solidFill>
                   <a:srgbClr val="1A1A1A"/>
                 </a:solidFill>
@@ -4346,18 +4971,18 @@
       </p:sp>
       <p:sp>
         <p:nvSpPr>
-          <p:cNvPr id="9" name="Rounded Rectangle 8"/>
+          <p:cNvPr id="10" name="Rounded Rectangle 9"/>
           <p:cNvSpPr/>
           <p:nvPr/>
         </p:nvSpPr>
         <p:spPr>
           <a:xfrm>
-            <a:off x="841248" y="2999232"/>
-            <a:ext cx="5715000" cy="530352"/>
+            <a:off x="6254496" y="2395728"/>
+            <a:ext cx="5138928" cy="786384"/>
           </a:xfrm>
           <a:prstGeom prst="roundRect">
             <a:avLst>
-              <a:gd name="adj" fmla="val 6000"/>
+              <a:gd name="adj" fmla="val 7000"/>
             </a:avLst>
           </a:prstGeom>
           <a:solidFill>
@@ -4392,9 +5017,55 @@
           </a:p>
         </p:txBody>
       </p:sp>
+      <p:sp>
+        <p:nvSpPr>
+          <p:cNvPr id="11" name="Rounded Rectangle 10"/>
+          <p:cNvSpPr/>
+          <p:nvPr/>
+        </p:nvSpPr>
+        <p:spPr>
+          <a:xfrm>
+            <a:off x="6400800" y="2532888"/>
+            <a:ext cx="512064" cy="512064"/>
+          </a:xfrm>
+          <a:prstGeom prst="roundRect">
+            <a:avLst>
+              <a:gd name="adj" fmla="val 26000"/>
+            </a:avLst>
+          </a:prstGeom>
+          <a:solidFill>
+            <a:srgbClr val="EE0000"/>
+          </a:solidFill>
+          <a:ln>
+            <a:noFill/>
+          </a:ln>
+          <a:effectLst/>
+        </p:spPr>
+        <p:style>
+          <a:lnRef idx="1">
+            <a:schemeClr val="accent1"/>
+          </a:lnRef>
+          <a:fillRef idx="3">
+            <a:schemeClr val="accent1"/>
+          </a:fillRef>
+          <a:effectRef idx="2">
+            <a:schemeClr val="accent1"/>
+          </a:effectRef>
+          <a:fontRef idx="minor">
+            <a:schemeClr val="lt1"/>
+          </a:fontRef>
+        </p:style>
+        <p:txBody>
+          <a:bodyPr rtlCol="0" anchor="ctr"/>
+          <a:lstStyle/>
+          <a:p>
+            <a:pPr algn="ctr"/>
+          </a:p>
+        </p:txBody>
+      </p:sp>
       <p:pic>
         <p:nvPicPr>
-          <p:cNvPr id="10" name="Picture 9" descr="check_steel.png"/>
+          <p:cNvPr id="12" name="Picture 11" descr="check_white.png"/>
           <p:cNvPicPr>
             <a:picLocks noChangeAspect="1"/>
           </p:cNvPicPr>
@@ -4408,8 +5079,8 @@
         </p:blipFill>
         <p:spPr>
           <a:xfrm>
-            <a:off x="987552" y="3145536"/>
-            <a:ext cx="237744" cy="237744"/>
+            <a:off x="6523695" y="2655783"/>
+            <a:ext cx="266273" cy="266273"/>
           </a:xfrm>
           <a:prstGeom prst="rect">
             <a:avLst/>
@@ -4418,14 +5089,14 @@
       </p:pic>
       <p:sp>
         <p:nvSpPr>
-          <p:cNvPr id="11" name="TextBox 10"/>
+          <p:cNvPr id="13" name="TextBox 12"/>
           <p:cNvSpPr txBox="1"/>
           <p:nvPr/>
         </p:nvSpPr>
         <p:spPr>
           <a:xfrm>
-            <a:off x="1353312" y="2999232"/>
-            <a:ext cx="5029200" cy="530352"/>
+            <a:off x="7040880" y="2395728"/>
+            <a:ext cx="4206240" cy="786384"/>
           </a:xfrm>
           <a:prstGeom prst="rect">
             <a:avLst/>
@@ -4450,7 +5121,7 @@
               </a:spcAft>
             </a:pPr>
             <a:r>
-              <a:rPr sz="1200" b="0">
+              <a:rPr sz="1150" b="0">
                 <a:solidFill>
                   <a:srgbClr val="1A1A1A"/>
                 </a:solidFill>
@@ -4463,18 +5134,18 @@
       </p:sp>
       <p:sp>
         <p:nvSpPr>
-          <p:cNvPr id="12" name="Rounded Rectangle 11"/>
+          <p:cNvPr id="14" name="Rounded Rectangle 13"/>
           <p:cNvSpPr/>
           <p:nvPr/>
         </p:nvSpPr>
         <p:spPr>
           <a:xfrm>
-            <a:off x="841248" y="3602736"/>
-            <a:ext cx="5715000" cy="530352"/>
+            <a:off x="841248" y="3328416"/>
+            <a:ext cx="5138928" cy="786384"/>
           </a:xfrm>
           <a:prstGeom prst="roundRect">
             <a:avLst>
-              <a:gd name="adj" fmla="val 6000"/>
+              <a:gd name="adj" fmla="val 7000"/>
             </a:avLst>
           </a:prstGeom>
           <a:solidFill>
@@ -4509,9 +5180,55 @@
           </a:p>
         </p:txBody>
       </p:sp>
+      <p:sp>
+        <p:nvSpPr>
+          <p:cNvPr id="15" name="Rounded Rectangle 14"/>
+          <p:cNvSpPr/>
+          <p:nvPr/>
+        </p:nvSpPr>
+        <p:spPr>
+          <a:xfrm>
+            <a:off x="987552" y="3465576"/>
+            <a:ext cx="512064" cy="512064"/>
+          </a:xfrm>
+          <a:prstGeom prst="roundRect">
+            <a:avLst>
+              <a:gd name="adj" fmla="val 26000"/>
+            </a:avLst>
+          </a:prstGeom>
+          <a:solidFill>
+            <a:srgbClr val="EE0000"/>
+          </a:solidFill>
+          <a:ln>
+            <a:noFill/>
+          </a:ln>
+          <a:effectLst/>
+        </p:spPr>
+        <p:style>
+          <a:lnRef idx="1">
+            <a:schemeClr val="accent1"/>
+          </a:lnRef>
+          <a:fillRef idx="3">
+            <a:schemeClr val="accent1"/>
+          </a:fillRef>
+          <a:effectRef idx="2">
+            <a:schemeClr val="accent1"/>
+          </a:effectRef>
+          <a:fontRef idx="minor">
+            <a:schemeClr val="lt1"/>
+          </a:fontRef>
+        </p:style>
+        <p:txBody>
+          <a:bodyPr rtlCol="0" anchor="ctr"/>
+          <a:lstStyle/>
+          <a:p>
+            <a:pPr algn="ctr"/>
+          </a:p>
+        </p:txBody>
+      </p:sp>
       <p:pic>
         <p:nvPicPr>
-          <p:cNvPr id="13" name="Picture 12" descr="check_steel.png"/>
+          <p:cNvPr id="16" name="Picture 15" descr="check_white.png"/>
           <p:cNvPicPr>
             <a:picLocks noChangeAspect="1"/>
           </p:cNvPicPr>
@@ -4525,8 +5242,8 @@
         </p:blipFill>
         <p:spPr>
           <a:xfrm>
-            <a:off x="987552" y="3749040"/>
-            <a:ext cx="237744" cy="237744"/>
+            <a:off x="1110447" y="3588471"/>
+            <a:ext cx="266273" cy="266273"/>
           </a:xfrm>
           <a:prstGeom prst="rect">
             <a:avLst/>
@@ -4535,14 +5252,14 @@
       </p:pic>
       <p:sp>
         <p:nvSpPr>
-          <p:cNvPr id="14" name="TextBox 13"/>
+          <p:cNvPr id="17" name="TextBox 16"/>
           <p:cNvSpPr txBox="1"/>
           <p:nvPr/>
         </p:nvSpPr>
         <p:spPr>
           <a:xfrm>
-            <a:off x="1353312" y="3602736"/>
-            <a:ext cx="5029200" cy="530352"/>
+            <a:off x="1627632" y="3328416"/>
+            <a:ext cx="4206240" cy="786384"/>
           </a:xfrm>
           <a:prstGeom prst="rect">
             <a:avLst/>
@@ -4567,7 +5284,7 @@
               </a:spcAft>
             </a:pPr>
             <a:r>
-              <a:rPr sz="1200" b="0">
+              <a:rPr sz="1150" b="0">
                 <a:solidFill>
                   <a:srgbClr val="1A1A1A"/>
                 </a:solidFill>
@@ -4580,18 +5297,18 @@
       </p:sp>
       <p:sp>
         <p:nvSpPr>
-          <p:cNvPr id="15" name="Rounded Rectangle 14"/>
+          <p:cNvPr id="18" name="Rounded Rectangle 17"/>
           <p:cNvSpPr/>
           <p:nvPr/>
         </p:nvSpPr>
         <p:spPr>
           <a:xfrm>
-            <a:off x="841248" y="4206240"/>
-            <a:ext cx="5715000" cy="530352"/>
+            <a:off x="6254496" y="3328416"/>
+            <a:ext cx="5138928" cy="786384"/>
           </a:xfrm>
           <a:prstGeom prst="roundRect">
             <a:avLst>
-              <a:gd name="adj" fmla="val 6000"/>
+              <a:gd name="adj" fmla="val 7000"/>
             </a:avLst>
           </a:prstGeom>
           <a:solidFill>
@@ -4626,9 +5343,55 @@
           </a:p>
         </p:txBody>
       </p:sp>
+      <p:sp>
+        <p:nvSpPr>
+          <p:cNvPr id="19" name="Rounded Rectangle 18"/>
+          <p:cNvSpPr/>
+          <p:nvPr/>
+        </p:nvSpPr>
+        <p:spPr>
+          <a:xfrm>
+            <a:off x="6400800" y="3465576"/>
+            <a:ext cx="512064" cy="512064"/>
+          </a:xfrm>
+          <a:prstGeom prst="roundRect">
+            <a:avLst>
+              <a:gd name="adj" fmla="val 26000"/>
+            </a:avLst>
+          </a:prstGeom>
+          <a:solidFill>
+            <a:srgbClr val="EE0000"/>
+          </a:solidFill>
+          <a:ln>
+            <a:noFill/>
+          </a:ln>
+          <a:effectLst/>
+        </p:spPr>
+        <p:style>
+          <a:lnRef idx="1">
+            <a:schemeClr val="accent1"/>
+          </a:lnRef>
+          <a:fillRef idx="3">
+            <a:schemeClr val="accent1"/>
+          </a:fillRef>
+          <a:effectRef idx="2">
+            <a:schemeClr val="accent1"/>
+          </a:effectRef>
+          <a:fontRef idx="minor">
+            <a:schemeClr val="lt1"/>
+          </a:fontRef>
+        </p:style>
+        <p:txBody>
+          <a:bodyPr rtlCol="0" anchor="ctr"/>
+          <a:lstStyle/>
+          <a:p>
+            <a:pPr algn="ctr"/>
+          </a:p>
+        </p:txBody>
+      </p:sp>
       <p:pic>
         <p:nvPicPr>
-          <p:cNvPr id="16" name="Picture 15" descr="check_steel.png"/>
+          <p:cNvPr id="20" name="Picture 19" descr="check_white.png"/>
           <p:cNvPicPr>
             <a:picLocks noChangeAspect="1"/>
           </p:cNvPicPr>
@@ -4642,8 +5405,8 @@
         </p:blipFill>
         <p:spPr>
           <a:xfrm>
-            <a:off x="987552" y="4352544"/>
-            <a:ext cx="237744" cy="237744"/>
+            <a:off x="6523695" y="3588471"/>
+            <a:ext cx="266273" cy="266273"/>
           </a:xfrm>
           <a:prstGeom prst="rect">
             <a:avLst/>
@@ -4652,14 +5415,14 @@
       </p:pic>
       <p:sp>
         <p:nvSpPr>
-          <p:cNvPr id="17" name="TextBox 16"/>
+          <p:cNvPr id="21" name="TextBox 20"/>
           <p:cNvSpPr txBox="1"/>
           <p:nvPr/>
         </p:nvSpPr>
         <p:spPr>
           <a:xfrm>
-            <a:off x="1353312" y="4206240"/>
-            <a:ext cx="5029200" cy="530352"/>
+            <a:off x="7040880" y="3328416"/>
+            <a:ext cx="4206240" cy="786384"/>
           </a:xfrm>
           <a:prstGeom prst="rect">
             <a:avLst/>
@@ -4684,7 +5447,7 @@
               </a:spcAft>
             </a:pPr>
             <a:r>
-              <a:rPr sz="1200" b="0">
+              <a:rPr sz="1150" b="0">
                 <a:solidFill>
                   <a:srgbClr val="1A1A1A"/>
                 </a:solidFill>
@@ -4697,18 +5460,18 @@
       </p:sp>
       <p:sp>
         <p:nvSpPr>
-          <p:cNvPr id="18" name="Rounded Rectangle 17"/>
+          <p:cNvPr id="22" name="Rounded Rectangle 21"/>
           <p:cNvSpPr/>
           <p:nvPr/>
         </p:nvSpPr>
         <p:spPr>
           <a:xfrm>
-            <a:off x="841248" y="4809744"/>
-            <a:ext cx="5715000" cy="530352"/>
+            <a:off x="841248" y="4261104"/>
+            <a:ext cx="5138928" cy="786384"/>
           </a:xfrm>
           <a:prstGeom prst="roundRect">
             <a:avLst>
-              <a:gd name="adj" fmla="val 6000"/>
+              <a:gd name="adj" fmla="val 7000"/>
             </a:avLst>
           </a:prstGeom>
           <a:solidFill>
@@ -4743,9 +5506,55 @@
           </a:p>
         </p:txBody>
       </p:sp>
+      <p:sp>
+        <p:nvSpPr>
+          <p:cNvPr id="23" name="Rounded Rectangle 22"/>
+          <p:cNvSpPr/>
+          <p:nvPr/>
+        </p:nvSpPr>
+        <p:spPr>
+          <a:xfrm>
+            <a:off x="987552" y="4398264"/>
+            <a:ext cx="512064" cy="512064"/>
+          </a:xfrm>
+          <a:prstGeom prst="roundRect">
+            <a:avLst>
+              <a:gd name="adj" fmla="val 26000"/>
+            </a:avLst>
+          </a:prstGeom>
+          <a:solidFill>
+            <a:srgbClr val="EE0000"/>
+          </a:solidFill>
+          <a:ln>
+            <a:noFill/>
+          </a:ln>
+          <a:effectLst/>
+        </p:spPr>
+        <p:style>
+          <a:lnRef idx="1">
+            <a:schemeClr val="accent1"/>
+          </a:lnRef>
+          <a:fillRef idx="3">
+            <a:schemeClr val="accent1"/>
+          </a:fillRef>
+          <a:effectRef idx="2">
+            <a:schemeClr val="accent1"/>
+          </a:effectRef>
+          <a:fontRef idx="minor">
+            <a:schemeClr val="lt1"/>
+          </a:fontRef>
+        </p:style>
+        <p:txBody>
+          <a:bodyPr rtlCol="0" anchor="ctr"/>
+          <a:lstStyle/>
+          <a:p>
+            <a:pPr algn="ctr"/>
+          </a:p>
+        </p:txBody>
+      </p:sp>
       <p:pic>
         <p:nvPicPr>
-          <p:cNvPr id="19" name="Picture 18" descr="check_steel.png"/>
+          <p:cNvPr id="24" name="Picture 23" descr="check_white.png"/>
           <p:cNvPicPr>
             <a:picLocks noChangeAspect="1"/>
           </p:cNvPicPr>
@@ -4759,8 +5568,8 @@
         </p:blipFill>
         <p:spPr>
           <a:xfrm>
-            <a:off x="987552" y="4956048"/>
-            <a:ext cx="237744" cy="237744"/>
+            <a:off x="1110447" y="4521159"/>
+            <a:ext cx="266273" cy="266273"/>
           </a:xfrm>
           <a:prstGeom prst="rect">
             <a:avLst/>
@@ -4769,14 +5578,14 @@
       </p:pic>
       <p:sp>
         <p:nvSpPr>
-          <p:cNvPr id="20" name="TextBox 19"/>
+          <p:cNvPr id="25" name="TextBox 24"/>
           <p:cNvSpPr txBox="1"/>
           <p:nvPr/>
         </p:nvSpPr>
         <p:spPr>
           <a:xfrm>
-            <a:off x="1353312" y="4809744"/>
-            <a:ext cx="5029200" cy="530352"/>
+            <a:off x="1627632" y="4261104"/>
+            <a:ext cx="4206240" cy="786384"/>
           </a:xfrm>
           <a:prstGeom prst="rect">
             <a:avLst/>
@@ -4801,221 +5610,13 @@
               </a:spcAft>
             </a:pPr>
             <a:r>
-              <a:rPr sz="1200" b="0">
+              <a:rPr sz="1150" b="0">
                 <a:solidFill>
                   <a:srgbClr val="1A1A1A"/>
                 </a:solidFill>
                 <a:latin typeface="Red Hat Text"/>
               </a:rPr>
               <a:t>The platform is powerful; nobody finds the on-ramp</a:t>
-            </a:r>
-          </a:p>
-        </p:txBody>
-      </p:sp>
-      <p:sp>
-        <p:nvSpPr>
-          <p:cNvPr id="21" name="Rounded Rectangle 20"/>
-          <p:cNvSpPr/>
-          <p:nvPr/>
-        </p:nvSpPr>
-        <p:spPr>
-          <a:xfrm>
-            <a:off x="6812280" y="2395728"/>
-            <a:ext cx="4538167" cy="2944368"/>
-          </a:xfrm>
-          <a:prstGeom prst="roundRect">
-            <a:avLst>
-              <a:gd name="adj" fmla="val 4000"/>
-            </a:avLst>
-          </a:prstGeom>
-          <a:solidFill>
-            <a:srgbClr val="FFFFFF"/>
-          </a:solidFill>
-          <a:ln w="15240">
-            <a:solidFill>
-              <a:srgbClr val="DDE1E6"/>
-            </a:solidFill>
-          </a:ln>
-          <a:effectLst/>
-        </p:spPr>
-        <p:style>
-          <a:lnRef idx="1">
-            <a:schemeClr val="accent1"/>
-          </a:lnRef>
-          <a:fillRef idx="3">
-            <a:schemeClr val="accent1"/>
-          </a:fillRef>
-          <a:effectRef idx="2">
-            <a:schemeClr val="accent1"/>
-          </a:effectRef>
-          <a:fontRef idx="minor">
-            <a:schemeClr val="lt1"/>
-          </a:fontRef>
-        </p:style>
-        <p:txBody>
-          <a:bodyPr rtlCol="0" anchor="ctr"/>
-          <a:lstStyle/>
-          <a:p>
-            <a:pPr algn="ctr"/>
-          </a:p>
-        </p:txBody>
-      </p:sp>
-      <p:sp>
-        <p:nvSpPr>
-          <p:cNvPr id="22" name="Rounded Rectangle 21"/>
-          <p:cNvSpPr/>
-          <p:nvPr/>
-        </p:nvSpPr>
-        <p:spPr>
-          <a:xfrm>
-            <a:off x="7013448" y="2596896"/>
-            <a:ext cx="1298448" cy="310896"/>
-          </a:xfrm>
-          <a:prstGeom prst="roundRect">
-            <a:avLst>
-              <a:gd name="adj" fmla="val 50000"/>
-            </a:avLst>
-          </a:prstGeom>
-          <a:solidFill>
-            <a:srgbClr val="FCECEC"/>
-          </a:solidFill>
-          <a:ln>
-            <a:noFill/>
-          </a:ln>
-          <a:effectLst/>
-        </p:spPr>
-        <p:style>
-          <a:lnRef idx="1">
-            <a:schemeClr val="accent1"/>
-          </a:lnRef>
-          <a:fillRef idx="3">
-            <a:schemeClr val="accent1"/>
-          </a:fillRef>
-          <a:effectRef idx="2">
-            <a:schemeClr val="accent1"/>
-          </a:effectRef>
-          <a:fontRef idx="minor">
-            <a:schemeClr val="lt1"/>
-          </a:fontRef>
-        </p:style>
-        <p:txBody>
-          <a:bodyPr rtlCol="0" anchor="ctr"/>
-          <a:lstStyle/>
-          <a:p>
-            <a:pPr algn="ctr"/>
-          </a:p>
-        </p:txBody>
-      </p:sp>
-      <p:sp>
-        <p:nvSpPr>
-          <p:cNvPr id="23" name="TextBox 22"/>
-          <p:cNvSpPr txBox="1"/>
-          <p:nvPr/>
-        </p:nvSpPr>
-        <p:spPr>
-          <a:xfrm>
-            <a:off x="7013448" y="2596896"/>
-            <a:ext cx="1298448" cy="310896"/>
-          </a:xfrm>
-          <a:prstGeom prst="rect">
-            <a:avLst/>
-          </a:prstGeom>
-          <a:noFill/>
-        </p:spPr>
-        <p:txBody>
-          <a:bodyPr wrap="none" anchor="ctr" lIns="0" rIns="0" tIns="0" bIns="0">
-            <a:spAutoFit/>
-          </a:bodyPr>
-          <a:lstStyle/>
-          <a:p>
-            <a:pPr algn="ctr">
-              <a:lnSpc>
-                <a:spcPct val="106000"/>
-              </a:lnSpc>
-              <a:spcBef>
-                <a:spcPts val="0"/>
-              </a:spcBef>
-              <a:spcAft>
-                <a:spcPts val="0"/>
-              </a:spcAft>
-            </a:pPr>
-            <a:r>
-              <a:rPr sz="850" b="1">
-                <a:solidFill>
-                  <a:srgbClr val="B80000"/>
-                </a:solidFill>
-                <a:latin typeface="Red Hat Display"/>
-              </a:rPr>
-              <a:t>MEDIA PASS</a:t>
-            </a:r>
-          </a:p>
-        </p:txBody>
-      </p:sp>
-      <p:pic>
-        <p:nvPicPr>
-          <p:cNvPr id="24" name="Picture 23" descr="eye_slate.png"/>
-          <p:cNvPicPr>
-            <a:picLocks noChangeAspect="1"/>
-          </p:cNvPicPr>
-          <p:nvPr/>
-        </p:nvPicPr>
-        <p:blipFill>
-          <a:blip r:embed="rId4"/>
-          <a:stretch>
-            <a:fillRect/>
-          </a:stretch>
-        </p:blipFill>
-        <p:spPr>
-          <a:xfrm>
-            <a:off x="8843619" y="3108960"/>
-            <a:ext cx="475488" cy="475488"/>
-          </a:xfrm>
-          <a:prstGeom prst="rect">
-            <a:avLst/>
-          </a:prstGeom>
-        </p:spPr>
-      </p:pic>
-      <p:sp>
-        <p:nvSpPr>
-          <p:cNvPr id="25" name="TextBox 24"/>
-          <p:cNvSpPr txBox="1"/>
-          <p:nvPr/>
-        </p:nvSpPr>
-        <p:spPr>
-          <a:xfrm>
-            <a:off x="7050024" y="3721608"/>
-            <a:ext cx="4062679" cy="1481328"/>
-          </a:xfrm>
-          <a:prstGeom prst="rect">
-            <a:avLst/>
-          </a:prstGeom>
-          <a:noFill/>
-        </p:spPr>
-        <p:txBody>
-          <a:bodyPr wrap="square" anchor="t" lIns="0" rIns="0" tIns="0" bIns="0">
-            <a:spAutoFit/>
-          </a:bodyPr>
-          <a:lstStyle/>
-          <a:p>
-            <a:pPr algn="l">
-              <a:lnSpc>
-                <a:spcPct val="120000"/>
-              </a:lnSpc>
-              <a:spcBef>
-                <a:spcPts val="0"/>
-              </a:spcBef>
-              <a:spcAft>
-                <a:spcPts val="0"/>
-              </a:spcAft>
-            </a:pPr>
-            <a:r>
-              <a:rPr sz="950" b="0">
-                <a:solidFill>
-                  <a:srgbClr val="8A9099"/>
-                </a:solidFill>
-                <a:latin typeface="Red Hat Text"/>
-              </a:rPr>
-              <a:t>A lone developer facing a wall of nine tool logos/boxes (build, pipeline, registry, GitOps, probes, metrics, tracing, catalog, workspace) with a tangle of arrows; a small "week 1: still plumbing" clock.</a:t>
             </a:r>
           </a:p>
         </p:txBody>
@@ -5368,11 +5969,11 @@
         <p:spPr>
           <a:xfrm>
             <a:off x="841248" y="2670048"/>
-            <a:ext cx="5715000" cy="530352"/>
+            <a:ext cx="5138928" cy="786384"/>
           </a:xfrm>
           <a:prstGeom prst="roundRect">
             <a:avLst>
-              <a:gd name="adj" fmla="val 6000"/>
+              <a:gd name="adj" fmla="val 7000"/>
             </a:avLst>
           </a:prstGeom>
           <a:solidFill>
@@ -5407,9 +6008,55 @@
           </a:p>
         </p:txBody>
       </p:sp>
+      <p:sp>
+        <p:nvSpPr>
+          <p:cNvPr id="8" name="Rounded Rectangle 7"/>
+          <p:cNvSpPr/>
+          <p:nvPr/>
+        </p:nvSpPr>
+        <p:spPr>
+          <a:xfrm>
+            <a:off x="987552" y="2807208"/>
+            <a:ext cx="512064" cy="512064"/>
+          </a:xfrm>
+          <a:prstGeom prst="roundRect">
+            <a:avLst>
+              <a:gd name="adj" fmla="val 26000"/>
+            </a:avLst>
+          </a:prstGeom>
+          <a:solidFill>
+            <a:srgbClr val="EE0000"/>
+          </a:solidFill>
+          <a:ln>
+            <a:noFill/>
+          </a:ln>
+          <a:effectLst/>
+        </p:spPr>
+        <p:style>
+          <a:lnRef idx="1">
+            <a:schemeClr val="accent1"/>
+          </a:lnRef>
+          <a:fillRef idx="3">
+            <a:schemeClr val="accent1"/>
+          </a:fillRef>
+          <a:effectRef idx="2">
+            <a:schemeClr val="accent1"/>
+          </a:effectRef>
+          <a:fontRef idx="minor">
+            <a:schemeClr val="lt1"/>
+          </a:fontRef>
+        </p:style>
+        <p:txBody>
+          <a:bodyPr rtlCol="0" anchor="ctr"/>
+          <a:lstStyle/>
+          <a:p>
+            <a:pPr algn="ctr"/>
+          </a:p>
+        </p:txBody>
+      </p:sp>
       <p:pic>
         <p:nvPicPr>
-          <p:cNvPr id="8" name="Picture 7" descr="check_steel.png"/>
+          <p:cNvPr id="9" name="Picture 8" descr="check_white.png"/>
           <p:cNvPicPr>
             <a:picLocks noChangeAspect="1"/>
           </p:cNvPicPr>
@@ -5423,8 +6070,8 @@
         </p:blipFill>
         <p:spPr>
           <a:xfrm>
-            <a:off x="987552" y="2816352"/>
-            <a:ext cx="237744" cy="237744"/>
+            <a:off x="1110447" y="2930103"/>
+            <a:ext cx="266273" cy="266273"/>
           </a:xfrm>
           <a:prstGeom prst="rect">
             <a:avLst/>
@@ -5433,14 +6080,14 @@
       </p:pic>
       <p:sp>
         <p:nvSpPr>
-          <p:cNvPr id="9" name="TextBox 8"/>
+          <p:cNvPr id="10" name="TextBox 9"/>
           <p:cNvSpPr txBox="1"/>
           <p:nvPr/>
         </p:nvSpPr>
         <p:spPr>
           <a:xfrm>
-            <a:off x="1353312" y="2670048"/>
-            <a:ext cx="5029200" cy="530352"/>
+            <a:off x="1627632" y="2670048"/>
+            <a:ext cx="4206240" cy="786384"/>
           </a:xfrm>
           <a:prstGeom prst="rect">
             <a:avLst/>
@@ -5465,7 +6112,7 @@
               </a:spcAft>
             </a:pPr>
             <a:r>
-              <a:rPr sz="1200" b="0">
+              <a:rPr sz="1150" b="0">
                 <a:solidFill>
                   <a:srgbClr val="1A1A1A"/>
                 </a:solidFill>
@@ -5478,18 +6125,18 @@
       </p:sp>
       <p:sp>
         <p:nvSpPr>
-          <p:cNvPr id="10" name="Rounded Rectangle 9"/>
+          <p:cNvPr id="11" name="Rounded Rectangle 10"/>
           <p:cNvSpPr/>
           <p:nvPr/>
         </p:nvSpPr>
         <p:spPr>
           <a:xfrm>
-            <a:off x="841248" y="3273552"/>
-            <a:ext cx="5715000" cy="530352"/>
+            <a:off x="6254496" y="2670048"/>
+            <a:ext cx="5138928" cy="786384"/>
           </a:xfrm>
           <a:prstGeom prst="roundRect">
             <a:avLst>
-              <a:gd name="adj" fmla="val 6000"/>
+              <a:gd name="adj" fmla="val 7000"/>
             </a:avLst>
           </a:prstGeom>
           <a:solidFill>
@@ -5524,9 +6171,55 @@
           </a:p>
         </p:txBody>
       </p:sp>
+      <p:sp>
+        <p:nvSpPr>
+          <p:cNvPr id="12" name="Rounded Rectangle 11"/>
+          <p:cNvSpPr/>
+          <p:nvPr/>
+        </p:nvSpPr>
+        <p:spPr>
+          <a:xfrm>
+            <a:off x="6400800" y="2807208"/>
+            <a:ext cx="512064" cy="512064"/>
+          </a:xfrm>
+          <a:prstGeom prst="roundRect">
+            <a:avLst>
+              <a:gd name="adj" fmla="val 26000"/>
+            </a:avLst>
+          </a:prstGeom>
+          <a:solidFill>
+            <a:srgbClr val="EE0000"/>
+          </a:solidFill>
+          <a:ln>
+            <a:noFill/>
+          </a:ln>
+          <a:effectLst/>
+        </p:spPr>
+        <p:style>
+          <a:lnRef idx="1">
+            <a:schemeClr val="accent1"/>
+          </a:lnRef>
+          <a:fillRef idx="3">
+            <a:schemeClr val="accent1"/>
+          </a:fillRef>
+          <a:effectRef idx="2">
+            <a:schemeClr val="accent1"/>
+          </a:effectRef>
+          <a:fontRef idx="minor">
+            <a:schemeClr val="lt1"/>
+          </a:fontRef>
+        </p:style>
+        <p:txBody>
+          <a:bodyPr rtlCol="0" anchor="ctr"/>
+          <a:lstStyle/>
+          <a:p>
+            <a:pPr algn="ctr"/>
+          </a:p>
+        </p:txBody>
+      </p:sp>
       <p:pic>
         <p:nvPicPr>
-          <p:cNvPr id="11" name="Picture 10" descr="check_steel.png"/>
+          <p:cNvPr id="13" name="Picture 12" descr="check_white.png"/>
           <p:cNvPicPr>
             <a:picLocks noChangeAspect="1"/>
           </p:cNvPicPr>
@@ -5540,8 +6233,8 @@
         </p:blipFill>
         <p:spPr>
           <a:xfrm>
-            <a:off x="987552" y="3419856"/>
-            <a:ext cx="237744" cy="237744"/>
+            <a:off x="6523695" y="2930103"/>
+            <a:ext cx="266273" cy="266273"/>
           </a:xfrm>
           <a:prstGeom prst="rect">
             <a:avLst/>
@@ -5550,14 +6243,14 @@
       </p:pic>
       <p:sp>
         <p:nvSpPr>
-          <p:cNvPr id="12" name="TextBox 11"/>
+          <p:cNvPr id="14" name="TextBox 13"/>
           <p:cNvSpPr txBox="1"/>
           <p:nvPr/>
         </p:nvSpPr>
         <p:spPr>
           <a:xfrm>
-            <a:off x="1353312" y="3273552"/>
-            <a:ext cx="5029200" cy="530352"/>
+            <a:off x="7040880" y="2670048"/>
+            <a:ext cx="4206240" cy="786384"/>
           </a:xfrm>
           <a:prstGeom prst="rect">
             <a:avLst/>
@@ -5582,7 +6275,7 @@
               </a:spcAft>
             </a:pPr>
             <a:r>
-              <a:rPr sz="1200" b="0">
+              <a:rPr sz="1150" b="0">
                 <a:solidFill>
                   <a:srgbClr val="1A1A1A"/>
                 </a:solidFill>
@@ -5595,18 +6288,18 @@
       </p:sp>
       <p:sp>
         <p:nvSpPr>
-          <p:cNvPr id="13" name="Rounded Rectangle 12"/>
+          <p:cNvPr id="15" name="Rounded Rectangle 14"/>
           <p:cNvSpPr/>
           <p:nvPr/>
         </p:nvSpPr>
         <p:spPr>
           <a:xfrm>
-            <a:off x="841248" y="3877056"/>
-            <a:ext cx="5715000" cy="530352"/>
+            <a:off x="841248" y="3602736"/>
+            <a:ext cx="5138928" cy="786384"/>
           </a:xfrm>
           <a:prstGeom prst="roundRect">
             <a:avLst>
-              <a:gd name="adj" fmla="val 6000"/>
+              <a:gd name="adj" fmla="val 7000"/>
             </a:avLst>
           </a:prstGeom>
           <a:solidFill>
@@ -5641,9 +6334,55 @@
           </a:p>
         </p:txBody>
       </p:sp>
+      <p:sp>
+        <p:nvSpPr>
+          <p:cNvPr id="16" name="Rounded Rectangle 15"/>
+          <p:cNvSpPr/>
+          <p:nvPr/>
+        </p:nvSpPr>
+        <p:spPr>
+          <a:xfrm>
+            <a:off x="987552" y="3739896"/>
+            <a:ext cx="512064" cy="512064"/>
+          </a:xfrm>
+          <a:prstGeom prst="roundRect">
+            <a:avLst>
+              <a:gd name="adj" fmla="val 26000"/>
+            </a:avLst>
+          </a:prstGeom>
+          <a:solidFill>
+            <a:srgbClr val="EE0000"/>
+          </a:solidFill>
+          <a:ln>
+            <a:noFill/>
+          </a:ln>
+          <a:effectLst/>
+        </p:spPr>
+        <p:style>
+          <a:lnRef idx="1">
+            <a:schemeClr val="accent1"/>
+          </a:lnRef>
+          <a:fillRef idx="3">
+            <a:schemeClr val="accent1"/>
+          </a:fillRef>
+          <a:effectRef idx="2">
+            <a:schemeClr val="accent1"/>
+          </a:effectRef>
+          <a:fontRef idx="minor">
+            <a:schemeClr val="lt1"/>
+          </a:fontRef>
+        </p:style>
+        <p:txBody>
+          <a:bodyPr rtlCol="0" anchor="ctr"/>
+          <a:lstStyle/>
+          <a:p>
+            <a:pPr algn="ctr"/>
+          </a:p>
+        </p:txBody>
+      </p:sp>
       <p:pic>
         <p:nvPicPr>
-          <p:cNvPr id="14" name="Picture 13" descr="check_steel.png"/>
+          <p:cNvPr id="17" name="Picture 16" descr="check_white.png"/>
           <p:cNvPicPr>
             <a:picLocks noChangeAspect="1"/>
           </p:cNvPicPr>
@@ -5657,8 +6396,8 @@
         </p:blipFill>
         <p:spPr>
           <a:xfrm>
-            <a:off x="987552" y="4023360"/>
-            <a:ext cx="237744" cy="237744"/>
+            <a:off x="1110447" y="3862791"/>
+            <a:ext cx="266273" cy="266273"/>
           </a:xfrm>
           <a:prstGeom prst="rect">
             <a:avLst/>
@@ -5667,14 +6406,14 @@
       </p:pic>
       <p:sp>
         <p:nvSpPr>
-          <p:cNvPr id="15" name="TextBox 14"/>
+          <p:cNvPr id="18" name="TextBox 17"/>
           <p:cNvSpPr txBox="1"/>
           <p:nvPr/>
         </p:nvSpPr>
         <p:spPr>
           <a:xfrm>
-            <a:off x="1353312" y="3877056"/>
-            <a:ext cx="5029200" cy="530352"/>
+            <a:off x="1627632" y="3602736"/>
+            <a:ext cx="4206240" cy="786384"/>
           </a:xfrm>
           <a:prstGeom prst="rect">
             <a:avLst/>
@@ -5699,7 +6438,7 @@
               </a:spcAft>
             </a:pPr>
             <a:r>
-              <a:rPr sz="1200" b="0">
+              <a:rPr sz="1150" b="0">
                 <a:solidFill>
                   <a:srgbClr val="1A1A1A"/>
                 </a:solidFill>
@@ -5712,18 +6451,18 @@
       </p:sp>
       <p:sp>
         <p:nvSpPr>
-          <p:cNvPr id="16" name="Rounded Rectangle 15"/>
+          <p:cNvPr id="19" name="Rounded Rectangle 18"/>
           <p:cNvSpPr/>
           <p:nvPr/>
         </p:nvSpPr>
         <p:spPr>
           <a:xfrm>
-            <a:off x="841248" y="4480560"/>
-            <a:ext cx="5715000" cy="530352"/>
+            <a:off x="6254496" y="3602736"/>
+            <a:ext cx="5138928" cy="786384"/>
           </a:xfrm>
           <a:prstGeom prst="roundRect">
             <a:avLst>
-              <a:gd name="adj" fmla="val 6000"/>
+              <a:gd name="adj" fmla="val 7000"/>
             </a:avLst>
           </a:prstGeom>
           <a:solidFill>
@@ -5758,9 +6497,55 @@
           </a:p>
         </p:txBody>
       </p:sp>
+      <p:sp>
+        <p:nvSpPr>
+          <p:cNvPr id="20" name="Rounded Rectangle 19"/>
+          <p:cNvSpPr/>
+          <p:nvPr/>
+        </p:nvSpPr>
+        <p:spPr>
+          <a:xfrm>
+            <a:off x="6400800" y="3739896"/>
+            <a:ext cx="512064" cy="512064"/>
+          </a:xfrm>
+          <a:prstGeom prst="roundRect">
+            <a:avLst>
+              <a:gd name="adj" fmla="val 26000"/>
+            </a:avLst>
+          </a:prstGeom>
+          <a:solidFill>
+            <a:srgbClr val="EE0000"/>
+          </a:solidFill>
+          <a:ln>
+            <a:noFill/>
+          </a:ln>
+          <a:effectLst/>
+        </p:spPr>
+        <p:style>
+          <a:lnRef idx="1">
+            <a:schemeClr val="accent1"/>
+          </a:lnRef>
+          <a:fillRef idx="3">
+            <a:schemeClr val="accent1"/>
+          </a:fillRef>
+          <a:effectRef idx="2">
+            <a:schemeClr val="accent1"/>
+          </a:effectRef>
+          <a:fontRef idx="minor">
+            <a:schemeClr val="lt1"/>
+          </a:fontRef>
+        </p:style>
+        <p:txBody>
+          <a:bodyPr rtlCol="0" anchor="ctr"/>
+          <a:lstStyle/>
+          <a:p>
+            <a:pPr algn="ctr"/>
+          </a:p>
+        </p:txBody>
+      </p:sp>
       <p:pic>
         <p:nvPicPr>
-          <p:cNvPr id="17" name="Picture 16" descr="check_steel.png"/>
+          <p:cNvPr id="21" name="Picture 20" descr="check_white.png"/>
           <p:cNvPicPr>
             <a:picLocks noChangeAspect="1"/>
           </p:cNvPicPr>
@@ -5774,8 +6559,8 @@
         </p:blipFill>
         <p:spPr>
           <a:xfrm>
-            <a:off x="987552" y="4626864"/>
-            <a:ext cx="237744" cy="237744"/>
+            <a:off x="6523695" y="3862791"/>
+            <a:ext cx="266273" cy="266273"/>
           </a:xfrm>
           <a:prstGeom prst="rect">
             <a:avLst/>
@@ -5784,14 +6569,14 @@
       </p:pic>
       <p:sp>
         <p:nvSpPr>
-          <p:cNvPr id="18" name="TextBox 17"/>
+          <p:cNvPr id="22" name="TextBox 21"/>
           <p:cNvSpPr txBox="1"/>
           <p:nvPr/>
         </p:nvSpPr>
         <p:spPr>
           <a:xfrm>
-            <a:off x="1353312" y="4480560"/>
-            <a:ext cx="5029200" cy="530352"/>
+            <a:off x="7040880" y="3602736"/>
+            <a:ext cx="4206240" cy="786384"/>
           </a:xfrm>
           <a:prstGeom prst="rect">
             <a:avLst/>
@@ -5816,7 +6601,7 @@
               </a:spcAft>
             </a:pPr>
             <a:r>
-              <a:rPr sz="1200" b="0">
+              <a:rPr sz="1150" b="0">
                 <a:solidFill>
                   <a:srgbClr val="1A1A1A"/>
                 </a:solidFill>
@@ -5829,18 +6614,18 @@
       </p:sp>
       <p:sp>
         <p:nvSpPr>
-          <p:cNvPr id="19" name="Rounded Rectangle 18"/>
+          <p:cNvPr id="23" name="Rounded Rectangle 22"/>
           <p:cNvSpPr/>
           <p:nvPr/>
         </p:nvSpPr>
         <p:spPr>
           <a:xfrm>
-            <a:off x="841248" y="5084064"/>
-            <a:ext cx="5715000" cy="530352"/>
+            <a:off x="841248" y="4535424"/>
+            <a:ext cx="5138928" cy="786384"/>
           </a:xfrm>
           <a:prstGeom prst="roundRect">
             <a:avLst>
-              <a:gd name="adj" fmla="val 6000"/>
+              <a:gd name="adj" fmla="val 7000"/>
             </a:avLst>
           </a:prstGeom>
           <a:solidFill>
@@ -5875,9 +6660,55 @@
           </a:p>
         </p:txBody>
       </p:sp>
+      <p:sp>
+        <p:nvSpPr>
+          <p:cNvPr id="24" name="Rounded Rectangle 23"/>
+          <p:cNvSpPr/>
+          <p:nvPr/>
+        </p:nvSpPr>
+        <p:spPr>
+          <a:xfrm>
+            <a:off x="987552" y="4672584"/>
+            <a:ext cx="512064" cy="512064"/>
+          </a:xfrm>
+          <a:prstGeom prst="roundRect">
+            <a:avLst>
+              <a:gd name="adj" fmla="val 26000"/>
+            </a:avLst>
+          </a:prstGeom>
+          <a:solidFill>
+            <a:srgbClr val="EE0000"/>
+          </a:solidFill>
+          <a:ln>
+            <a:noFill/>
+          </a:ln>
+          <a:effectLst/>
+        </p:spPr>
+        <p:style>
+          <a:lnRef idx="1">
+            <a:schemeClr val="accent1"/>
+          </a:lnRef>
+          <a:fillRef idx="3">
+            <a:schemeClr val="accent1"/>
+          </a:fillRef>
+          <a:effectRef idx="2">
+            <a:schemeClr val="accent1"/>
+          </a:effectRef>
+          <a:fontRef idx="minor">
+            <a:schemeClr val="lt1"/>
+          </a:fontRef>
+        </p:style>
+        <p:txBody>
+          <a:bodyPr rtlCol="0" anchor="ctr"/>
+          <a:lstStyle/>
+          <a:p>
+            <a:pPr algn="ctr"/>
+          </a:p>
+        </p:txBody>
+      </p:sp>
       <p:pic>
         <p:nvPicPr>
-          <p:cNvPr id="20" name="Picture 19" descr="check_steel.png"/>
+          <p:cNvPr id="25" name="Picture 24" descr="check_white.png"/>
           <p:cNvPicPr>
             <a:picLocks noChangeAspect="1"/>
           </p:cNvPicPr>
@@ -5891,8 +6722,8 @@
         </p:blipFill>
         <p:spPr>
           <a:xfrm>
-            <a:off x="987552" y="5230368"/>
-            <a:ext cx="237744" cy="237744"/>
+            <a:off x="1110447" y="4795479"/>
+            <a:ext cx="266273" cy="266273"/>
           </a:xfrm>
           <a:prstGeom prst="rect">
             <a:avLst/>
@@ -5901,14 +6732,14 @@
       </p:pic>
       <p:sp>
         <p:nvSpPr>
-          <p:cNvPr id="21" name="TextBox 20"/>
+          <p:cNvPr id="26" name="TextBox 25"/>
           <p:cNvSpPr txBox="1"/>
           <p:nvPr/>
         </p:nvSpPr>
         <p:spPr>
           <a:xfrm>
-            <a:off x="1353312" y="5084064"/>
-            <a:ext cx="5029200" cy="530352"/>
+            <a:off x="1627632" y="4535424"/>
+            <a:ext cx="4206240" cy="786384"/>
           </a:xfrm>
           <a:prstGeom prst="rect">
             <a:avLst/>
@@ -5933,221 +6764,13 @@
               </a:spcAft>
             </a:pPr>
             <a:r>
-              <a:rPr sz="1200" b="0">
+              <a:rPr sz="1150" b="0">
                 <a:solidFill>
                   <a:srgbClr val="1A1A1A"/>
                 </a:solidFill>
                 <a:latin typeface="Red Hat Text"/>
               </a:rPr>
               <a:t>Sourced from files next to the code</a:t>
-            </a:r>
-          </a:p>
-        </p:txBody>
-      </p:sp>
-      <p:sp>
-        <p:nvSpPr>
-          <p:cNvPr id="22" name="Rounded Rectangle 21"/>
-          <p:cNvSpPr/>
-          <p:nvPr/>
-        </p:nvSpPr>
-        <p:spPr>
-          <a:xfrm>
-            <a:off x="6812280" y="2670048"/>
-            <a:ext cx="4538167" cy="2944368"/>
-          </a:xfrm>
-          <a:prstGeom prst="roundRect">
-            <a:avLst>
-              <a:gd name="adj" fmla="val 4000"/>
-            </a:avLst>
-          </a:prstGeom>
-          <a:solidFill>
-            <a:srgbClr val="FFFFFF"/>
-          </a:solidFill>
-          <a:ln w="15240">
-            <a:solidFill>
-              <a:srgbClr val="DDE1E6"/>
-            </a:solidFill>
-          </a:ln>
-          <a:effectLst/>
-        </p:spPr>
-        <p:style>
-          <a:lnRef idx="1">
-            <a:schemeClr val="accent1"/>
-          </a:lnRef>
-          <a:fillRef idx="3">
-            <a:schemeClr val="accent1"/>
-          </a:fillRef>
-          <a:effectRef idx="2">
-            <a:schemeClr val="accent1"/>
-          </a:effectRef>
-          <a:fontRef idx="minor">
-            <a:schemeClr val="lt1"/>
-          </a:fontRef>
-        </p:style>
-        <p:txBody>
-          <a:bodyPr rtlCol="0" anchor="ctr"/>
-          <a:lstStyle/>
-          <a:p>
-            <a:pPr algn="ctr"/>
-          </a:p>
-        </p:txBody>
-      </p:sp>
-      <p:sp>
-        <p:nvSpPr>
-          <p:cNvPr id="23" name="Rounded Rectangle 22"/>
-          <p:cNvSpPr/>
-          <p:nvPr/>
-        </p:nvSpPr>
-        <p:spPr>
-          <a:xfrm>
-            <a:off x="7013448" y="2871216"/>
-            <a:ext cx="1298448" cy="310896"/>
-          </a:xfrm>
-          <a:prstGeom prst="roundRect">
-            <a:avLst>
-              <a:gd name="adj" fmla="val 50000"/>
-            </a:avLst>
-          </a:prstGeom>
-          <a:solidFill>
-            <a:srgbClr val="FCECEC"/>
-          </a:solidFill>
-          <a:ln>
-            <a:noFill/>
-          </a:ln>
-          <a:effectLst/>
-        </p:spPr>
-        <p:style>
-          <a:lnRef idx="1">
-            <a:schemeClr val="accent1"/>
-          </a:lnRef>
-          <a:fillRef idx="3">
-            <a:schemeClr val="accent1"/>
-          </a:fillRef>
-          <a:effectRef idx="2">
-            <a:schemeClr val="accent1"/>
-          </a:effectRef>
-          <a:fontRef idx="minor">
-            <a:schemeClr val="lt1"/>
-          </a:fontRef>
-        </p:style>
-        <p:txBody>
-          <a:bodyPr rtlCol="0" anchor="ctr"/>
-          <a:lstStyle/>
-          <a:p>
-            <a:pPr algn="ctr"/>
-          </a:p>
-        </p:txBody>
-      </p:sp>
-      <p:sp>
-        <p:nvSpPr>
-          <p:cNvPr id="24" name="TextBox 23"/>
-          <p:cNvSpPr txBox="1"/>
-          <p:nvPr/>
-        </p:nvSpPr>
-        <p:spPr>
-          <a:xfrm>
-            <a:off x="7013448" y="2871216"/>
-            <a:ext cx="1298448" cy="310896"/>
-          </a:xfrm>
-          <a:prstGeom prst="rect">
-            <a:avLst/>
-          </a:prstGeom>
-          <a:noFill/>
-        </p:spPr>
-        <p:txBody>
-          <a:bodyPr wrap="none" anchor="ctr" lIns="0" rIns="0" tIns="0" bIns="0">
-            <a:spAutoFit/>
-          </a:bodyPr>
-          <a:lstStyle/>
-          <a:p>
-            <a:pPr algn="ctr">
-              <a:lnSpc>
-                <a:spcPct val="106000"/>
-              </a:lnSpc>
-              <a:spcBef>
-                <a:spcPts val="0"/>
-              </a:spcBef>
-              <a:spcAft>
-                <a:spcPts val="0"/>
-              </a:spcAft>
-            </a:pPr>
-            <a:r>
-              <a:rPr sz="850" b="1">
-                <a:solidFill>
-                  <a:srgbClr val="B80000"/>
-                </a:solidFill>
-                <a:latin typeface="Red Hat Display"/>
-              </a:rPr>
-              <a:t>MEDIA PASS</a:t>
-            </a:r>
-          </a:p>
-        </p:txBody>
-      </p:sp>
-      <p:pic>
-        <p:nvPicPr>
-          <p:cNvPr id="25" name="Picture 24" descr="eye_slate.png"/>
-          <p:cNvPicPr>
-            <a:picLocks noChangeAspect="1"/>
-          </p:cNvPicPr>
-          <p:nvPr/>
-        </p:nvPicPr>
-        <p:blipFill>
-          <a:blip r:embed="rId4"/>
-          <a:stretch>
-            <a:fillRect/>
-          </a:stretch>
-        </p:blipFill>
-        <p:spPr>
-          <a:xfrm>
-            <a:off x="8843619" y="3383280"/>
-            <a:ext cx="475488" cy="475488"/>
-          </a:xfrm>
-          <a:prstGeom prst="rect">
-            <a:avLst/>
-          </a:prstGeom>
-        </p:spPr>
-      </p:pic>
-      <p:sp>
-        <p:nvSpPr>
-          <p:cNvPr id="26" name="TextBox 25"/>
-          <p:cNvSpPr txBox="1"/>
-          <p:nvPr/>
-        </p:nvSpPr>
-        <p:spPr>
-          <a:xfrm>
-            <a:off x="7050024" y="3995928"/>
-            <a:ext cx="4062679" cy="1481328"/>
-          </a:xfrm>
-          <a:prstGeom prst="rect">
-            <a:avLst/>
-          </a:prstGeom>
-          <a:noFill/>
-        </p:spPr>
-        <p:txBody>
-          <a:bodyPr wrap="square" anchor="t" lIns="0" rIns="0" tIns="0" bIns="0">
-            <a:spAutoFit/>
-          </a:bodyPr>
-          <a:lstStyle/>
-          <a:p>
-            <a:pPr algn="l">
-              <a:lnSpc>
-                <a:spcPct val="120000"/>
-              </a:lnSpc>
-              <a:spcBef>
-                <a:spcPts val="0"/>
-              </a:spcBef>
-              <a:spcAft>
-                <a:spcPts val="0"/>
-              </a:spcAft>
-            </a:pPr>
-            <a:r>
-              <a:rPr sz="950" b="0">
-                <a:solidFill>
-                  <a:srgbClr val="8A9099"/>
-                </a:solidFill>
-                <a:latin typeface="Red Hat Text"/>
-              </a:rPr>
-              <a:t>Concept diagram developer-hub-golden-paths-01-catalog-model — System box containing Components + an API, a Group owning them, provides/consumes arrows.</a:t>
             </a:r>
           </a:p>
         </p:txBody>
@@ -6455,11 +7078,11 @@
         <p:spPr>
           <a:xfrm>
             <a:off x="841248" y="2395728"/>
-            <a:ext cx="5715000" cy="530352"/>
+            <a:ext cx="5138928" cy="786384"/>
           </a:xfrm>
           <a:prstGeom prst="roundRect">
             <a:avLst>
-              <a:gd name="adj" fmla="val 6000"/>
+              <a:gd name="adj" fmla="val 7000"/>
             </a:avLst>
           </a:prstGeom>
           <a:solidFill>
@@ -6494,9 +7117,55 @@
           </a:p>
         </p:txBody>
       </p:sp>
+      <p:sp>
+        <p:nvSpPr>
+          <p:cNvPr id="7" name="Rounded Rectangle 6"/>
+          <p:cNvSpPr/>
+          <p:nvPr/>
+        </p:nvSpPr>
+        <p:spPr>
+          <a:xfrm>
+            <a:off x="987552" y="2532888"/>
+            <a:ext cx="512064" cy="512064"/>
+          </a:xfrm>
+          <a:prstGeom prst="roundRect">
+            <a:avLst>
+              <a:gd name="adj" fmla="val 26000"/>
+            </a:avLst>
+          </a:prstGeom>
+          <a:solidFill>
+            <a:srgbClr val="EE0000"/>
+          </a:solidFill>
+          <a:ln>
+            <a:noFill/>
+          </a:ln>
+          <a:effectLst/>
+        </p:spPr>
+        <p:style>
+          <a:lnRef idx="1">
+            <a:schemeClr val="accent1"/>
+          </a:lnRef>
+          <a:fillRef idx="3">
+            <a:schemeClr val="accent1"/>
+          </a:fillRef>
+          <a:effectRef idx="2">
+            <a:schemeClr val="accent1"/>
+          </a:effectRef>
+          <a:fontRef idx="minor">
+            <a:schemeClr val="lt1"/>
+          </a:fontRef>
+        </p:style>
+        <p:txBody>
+          <a:bodyPr rtlCol="0" anchor="ctr"/>
+          <a:lstStyle/>
+          <a:p>
+            <a:pPr algn="ctr"/>
+          </a:p>
+        </p:txBody>
+      </p:sp>
       <p:pic>
         <p:nvPicPr>
-          <p:cNvPr id="7" name="Picture 6" descr="check_steel.png"/>
+          <p:cNvPr id="8" name="Picture 7" descr="check_white.png"/>
           <p:cNvPicPr>
             <a:picLocks noChangeAspect="1"/>
           </p:cNvPicPr>
@@ -6510,8 +7179,8 @@
         </p:blipFill>
         <p:spPr>
           <a:xfrm>
-            <a:off x="987552" y="2542032"/>
-            <a:ext cx="237744" cy="237744"/>
+            <a:off x="1110447" y="2655783"/>
+            <a:ext cx="266273" cy="266273"/>
           </a:xfrm>
           <a:prstGeom prst="rect">
             <a:avLst/>
@@ -6520,14 +7189,14 @@
       </p:pic>
       <p:sp>
         <p:nvSpPr>
-          <p:cNvPr id="8" name="TextBox 7"/>
+          <p:cNvPr id="9" name="TextBox 8"/>
           <p:cNvSpPr txBox="1"/>
           <p:nvPr/>
         </p:nvSpPr>
         <p:spPr>
           <a:xfrm>
-            <a:off x="1353312" y="2395728"/>
-            <a:ext cx="5029200" cy="530352"/>
+            <a:off x="1627632" y="2395728"/>
+            <a:ext cx="4206240" cy="786384"/>
           </a:xfrm>
           <a:prstGeom prst="rect">
             <a:avLst/>
@@ -6552,7 +7221,7 @@
               </a:spcAft>
             </a:pPr>
             <a:r>
-              <a:rPr sz="1200" b="0">
+              <a:rPr sz="1150" b="0">
                 <a:solidFill>
                   <a:srgbClr val="1A1A1A"/>
                 </a:solidFill>
@@ -6565,18 +7234,18 @@
       </p:sp>
       <p:sp>
         <p:nvSpPr>
-          <p:cNvPr id="9" name="Rounded Rectangle 8"/>
+          <p:cNvPr id="10" name="Rounded Rectangle 9"/>
           <p:cNvSpPr/>
           <p:nvPr/>
         </p:nvSpPr>
         <p:spPr>
           <a:xfrm>
-            <a:off x="841248" y="2999232"/>
-            <a:ext cx="5715000" cy="530352"/>
+            <a:off x="6254496" y="2395728"/>
+            <a:ext cx="5138928" cy="786384"/>
           </a:xfrm>
           <a:prstGeom prst="roundRect">
             <a:avLst>
-              <a:gd name="adj" fmla="val 6000"/>
+              <a:gd name="adj" fmla="val 7000"/>
             </a:avLst>
           </a:prstGeom>
           <a:solidFill>
@@ -6611,9 +7280,55 @@
           </a:p>
         </p:txBody>
       </p:sp>
+      <p:sp>
+        <p:nvSpPr>
+          <p:cNvPr id="11" name="Rounded Rectangle 10"/>
+          <p:cNvSpPr/>
+          <p:nvPr/>
+        </p:nvSpPr>
+        <p:spPr>
+          <a:xfrm>
+            <a:off x="6400800" y="2532888"/>
+            <a:ext cx="512064" cy="512064"/>
+          </a:xfrm>
+          <a:prstGeom prst="roundRect">
+            <a:avLst>
+              <a:gd name="adj" fmla="val 26000"/>
+            </a:avLst>
+          </a:prstGeom>
+          <a:solidFill>
+            <a:srgbClr val="EE0000"/>
+          </a:solidFill>
+          <a:ln>
+            <a:noFill/>
+          </a:ln>
+          <a:effectLst/>
+        </p:spPr>
+        <p:style>
+          <a:lnRef idx="1">
+            <a:schemeClr val="accent1"/>
+          </a:lnRef>
+          <a:fillRef idx="3">
+            <a:schemeClr val="accent1"/>
+          </a:fillRef>
+          <a:effectRef idx="2">
+            <a:schemeClr val="accent1"/>
+          </a:effectRef>
+          <a:fontRef idx="minor">
+            <a:schemeClr val="lt1"/>
+          </a:fontRef>
+        </p:style>
+        <p:txBody>
+          <a:bodyPr rtlCol="0" anchor="ctr"/>
+          <a:lstStyle/>
+          <a:p>
+            <a:pPr algn="ctr"/>
+          </a:p>
+        </p:txBody>
+      </p:sp>
       <p:pic>
         <p:nvPicPr>
-          <p:cNvPr id="10" name="Picture 9" descr="check_steel.png"/>
+          <p:cNvPr id="12" name="Picture 11" descr="check_white.png"/>
           <p:cNvPicPr>
             <a:picLocks noChangeAspect="1"/>
           </p:cNvPicPr>
@@ -6627,8 +7342,8 @@
         </p:blipFill>
         <p:spPr>
           <a:xfrm>
-            <a:off x="987552" y="3145536"/>
-            <a:ext cx="237744" cy="237744"/>
+            <a:off x="6523695" y="2655783"/>
+            <a:ext cx="266273" cy="266273"/>
           </a:xfrm>
           <a:prstGeom prst="rect">
             <a:avLst/>
@@ -6637,14 +7352,14 @@
       </p:pic>
       <p:sp>
         <p:nvSpPr>
-          <p:cNvPr id="11" name="TextBox 10"/>
+          <p:cNvPr id="13" name="TextBox 12"/>
           <p:cNvSpPr txBox="1"/>
           <p:nvPr/>
         </p:nvSpPr>
         <p:spPr>
           <a:xfrm>
-            <a:off x="1353312" y="2999232"/>
-            <a:ext cx="5029200" cy="530352"/>
+            <a:off x="7040880" y="2395728"/>
+            <a:ext cx="4206240" cy="786384"/>
           </a:xfrm>
           <a:prstGeom prst="rect">
             <a:avLst/>
@@ -6669,7 +7384,7 @@
               </a:spcAft>
             </a:pPr>
             <a:r>
-              <a:rPr sz="1200" b="0">
+              <a:rPr sz="1150" b="0">
                 <a:solidFill>
                   <a:srgbClr val="1A1A1A"/>
                 </a:solidFill>
@@ -6682,18 +7397,18 @@
       </p:sp>
       <p:sp>
         <p:nvSpPr>
-          <p:cNvPr id="12" name="Rounded Rectangle 11"/>
+          <p:cNvPr id="14" name="Rounded Rectangle 13"/>
           <p:cNvSpPr/>
           <p:nvPr/>
         </p:nvSpPr>
         <p:spPr>
           <a:xfrm>
-            <a:off x="841248" y="3602736"/>
-            <a:ext cx="5715000" cy="530352"/>
+            <a:off x="841248" y="3328416"/>
+            <a:ext cx="5138928" cy="786384"/>
           </a:xfrm>
           <a:prstGeom prst="roundRect">
             <a:avLst>
-              <a:gd name="adj" fmla="val 6000"/>
+              <a:gd name="adj" fmla="val 7000"/>
             </a:avLst>
           </a:prstGeom>
           <a:solidFill>
@@ -6728,9 +7443,55 @@
           </a:p>
         </p:txBody>
       </p:sp>
+      <p:sp>
+        <p:nvSpPr>
+          <p:cNvPr id="15" name="Rounded Rectangle 14"/>
+          <p:cNvSpPr/>
+          <p:nvPr/>
+        </p:nvSpPr>
+        <p:spPr>
+          <a:xfrm>
+            <a:off x="987552" y="3465576"/>
+            <a:ext cx="512064" cy="512064"/>
+          </a:xfrm>
+          <a:prstGeom prst="roundRect">
+            <a:avLst>
+              <a:gd name="adj" fmla="val 26000"/>
+            </a:avLst>
+          </a:prstGeom>
+          <a:solidFill>
+            <a:srgbClr val="EE0000"/>
+          </a:solidFill>
+          <a:ln>
+            <a:noFill/>
+          </a:ln>
+          <a:effectLst/>
+        </p:spPr>
+        <p:style>
+          <a:lnRef idx="1">
+            <a:schemeClr val="accent1"/>
+          </a:lnRef>
+          <a:fillRef idx="3">
+            <a:schemeClr val="accent1"/>
+          </a:fillRef>
+          <a:effectRef idx="2">
+            <a:schemeClr val="accent1"/>
+          </a:effectRef>
+          <a:fontRef idx="minor">
+            <a:schemeClr val="lt1"/>
+          </a:fontRef>
+        </p:style>
+        <p:txBody>
+          <a:bodyPr rtlCol="0" anchor="ctr"/>
+          <a:lstStyle/>
+          <a:p>
+            <a:pPr algn="ctr"/>
+          </a:p>
+        </p:txBody>
+      </p:sp>
       <p:pic>
         <p:nvPicPr>
-          <p:cNvPr id="13" name="Picture 12" descr="check_steel.png"/>
+          <p:cNvPr id="16" name="Picture 15" descr="check_white.png"/>
           <p:cNvPicPr>
             <a:picLocks noChangeAspect="1"/>
           </p:cNvPicPr>
@@ -6744,8 +7505,8 @@
         </p:blipFill>
         <p:spPr>
           <a:xfrm>
-            <a:off x="987552" y="3749040"/>
-            <a:ext cx="237744" cy="237744"/>
+            <a:off x="1110447" y="3588471"/>
+            <a:ext cx="266273" cy="266273"/>
           </a:xfrm>
           <a:prstGeom prst="rect">
             <a:avLst/>
@@ -6754,14 +7515,14 @@
       </p:pic>
       <p:sp>
         <p:nvSpPr>
-          <p:cNvPr id="14" name="TextBox 13"/>
+          <p:cNvPr id="17" name="TextBox 16"/>
           <p:cNvSpPr txBox="1"/>
           <p:nvPr/>
         </p:nvSpPr>
         <p:spPr>
           <a:xfrm>
-            <a:off x="1353312" y="3602736"/>
-            <a:ext cx="5029200" cy="530352"/>
+            <a:off x="1627632" y="3328416"/>
+            <a:ext cx="4206240" cy="786384"/>
           </a:xfrm>
           <a:prstGeom prst="rect">
             <a:avLst/>
@@ -6786,7 +7547,7 @@
               </a:spcAft>
             </a:pPr>
             <a:r>
-              <a:rPr sz="1200" b="0">
+              <a:rPr sz="1150" b="0">
                 <a:solidFill>
                   <a:srgbClr val="1A1A1A"/>
                 </a:solidFill>
@@ -6799,18 +7560,18 @@
       </p:sp>
       <p:sp>
         <p:nvSpPr>
-          <p:cNvPr id="15" name="Rounded Rectangle 14"/>
+          <p:cNvPr id="18" name="Rounded Rectangle 17"/>
           <p:cNvSpPr/>
           <p:nvPr/>
         </p:nvSpPr>
         <p:spPr>
           <a:xfrm>
-            <a:off x="841248" y="4206240"/>
-            <a:ext cx="5715000" cy="530352"/>
+            <a:off x="6254496" y="3328416"/>
+            <a:ext cx="5138928" cy="786384"/>
           </a:xfrm>
           <a:prstGeom prst="roundRect">
             <a:avLst>
-              <a:gd name="adj" fmla="val 6000"/>
+              <a:gd name="adj" fmla="val 7000"/>
             </a:avLst>
           </a:prstGeom>
           <a:solidFill>
@@ -6845,9 +7606,55 @@
           </a:p>
         </p:txBody>
       </p:sp>
+      <p:sp>
+        <p:nvSpPr>
+          <p:cNvPr id="19" name="Rounded Rectangle 18"/>
+          <p:cNvSpPr/>
+          <p:nvPr/>
+        </p:nvSpPr>
+        <p:spPr>
+          <a:xfrm>
+            <a:off x="6400800" y="3465576"/>
+            <a:ext cx="512064" cy="512064"/>
+          </a:xfrm>
+          <a:prstGeom prst="roundRect">
+            <a:avLst>
+              <a:gd name="adj" fmla="val 26000"/>
+            </a:avLst>
+          </a:prstGeom>
+          <a:solidFill>
+            <a:srgbClr val="EE0000"/>
+          </a:solidFill>
+          <a:ln>
+            <a:noFill/>
+          </a:ln>
+          <a:effectLst/>
+        </p:spPr>
+        <p:style>
+          <a:lnRef idx="1">
+            <a:schemeClr val="accent1"/>
+          </a:lnRef>
+          <a:fillRef idx="3">
+            <a:schemeClr val="accent1"/>
+          </a:fillRef>
+          <a:effectRef idx="2">
+            <a:schemeClr val="accent1"/>
+          </a:effectRef>
+          <a:fontRef idx="minor">
+            <a:schemeClr val="lt1"/>
+          </a:fontRef>
+        </p:style>
+        <p:txBody>
+          <a:bodyPr rtlCol="0" anchor="ctr"/>
+          <a:lstStyle/>
+          <a:p>
+            <a:pPr algn="ctr"/>
+          </a:p>
+        </p:txBody>
+      </p:sp>
       <p:pic>
         <p:nvPicPr>
-          <p:cNvPr id="16" name="Picture 15" descr="check_steel.png"/>
+          <p:cNvPr id="20" name="Picture 19" descr="check_white.png"/>
           <p:cNvPicPr>
             <a:picLocks noChangeAspect="1"/>
           </p:cNvPicPr>
@@ -6861,8 +7668,8 @@
         </p:blipFill>
         <p:spPr>
           <a:xfrm>
-            <a:off x="987552" y="4352544"/>
-            <a:ext cx="237744" cy="237744"/>
+            <a:off x="6523695" y="3588471"/>
+            <a:ext cx="266273" cy="266273"/>
           </a:xfrm>
           <a:prstGeom prst="rect">
             <a:avLst/>
@@ -6871,14 +7678,14 @@
       </p:pic>
       <p:sp>
         <p:nvSpPr>
-          <p:cNvPr id="17" name="TextBox 16"/>
+          <p:cNvPr id="21" name="TextBox 20"/>
           <p:cNvSpPr txBox="1"/>
           <p:nvPr/>
         </p:nvSpPr>
         <p:spPr>
           <a:xfrm>
-            <a:off x="1353312" y="4206240"/>
-            <a:ext cx="5029200" cy="530352"/>
+            <a:off x="7040880" y="3328416"/>
+            <a:ext cx="4206240" cy="786384"/>
           </a:xfrm>
           <a:prstGeom prst="rect">
             <a:avLst/>
@@ -6903,7 +7710,7 @@
               </a:spcAft>
             </a:pPr>
             <a:r>
-              <a:rPr sz="1200" b="0">
+              <a:rPr sz="1150" b="0">
                 <a:solidFill>
                   <a:srgbClr val="1A1A1A"/>
                 </a:solidFill>
@@ -6916,18 +7723,18 @@
       </p:sp>
       <p:sp>
         <p:nvSpPr>
-          <p:cNvPr id="18" name="Rounded Rectangle 17"/>
+          <p:cNvPr id="22" name="Rounded Rectangle 21"/>
           <p:cNvSpPr/>
           <p:nvPr/>
         </p:nvSpPr>
         <p:spPr>
           <a:xfrm>
-            <a:off x="841248" y="4809744"/>
-            <a:ext cx="5715000" cy="530352"/>
+            <a:off x="841248" y="4261104"/>
+            <a:ext cx="5138928" cy="786384"/>
           </a:xfrm>
           <a:prstGeom prst="roundRect">
             <a:avLst>
-              <a:gd name="adj" fmla="val 6000"/>
+              <a:gd name="adj" fmla="val 7000"/>
             </a:avLst>
           </a:prstGeom>
           <a:solidFill>
@@ -6962,9 +7769,55 @@
           </a:p>
         </p:txBody>
       </p:sp>
+      <p:sp>
+        <p:nvSpPr>
+          <p:cNvPr id="23" name="Rounded Rectangle 22"/>
+          <p:cNvSpPr/>
+          <p:nvPr/>
+        </p:nvSpPr>
+        <p:spPr>
+          <a:xfrm>
+            <a:off x="987552" y="4398264"/>
+            <a:ext cx="512064" cy="512064"/>
+          </a:xfrm>
+          <a:prstGeom prst="roundRect">
+            <a:avLst>
+              <a:gd name="adj" fmla="val 26000"/>
+            </a:avLst>
+          </a:prstGeom>
+          <a:solidFill>
+            <a:srgbClr val="EE0000"/>
+          </a:solidFill>
+          <a:ln>
+            <a:noFill/>
+          </a:ln>
+          <a:effectLst/>
+        </p:spPr>
+        <p:style>
+          <a:lnRef idx="1">
+            <a:schemeClr val="accent1"/>
+          </a:lnRef>
+          <a:fillRef idx="3">
+            <a:schemeClr val="accent1"/>
+          </a:fillRef>
+          <a:effectRef idx="2">
+            <a:schemeClr val="accent1"/>
+          </a:effectRef>
+          <a:fontRef idx="minor">
+            <a:schemeClr val="lt1"/>
+          </a:fontRef>
+        </p:style>
+        <p:txBody>
+          <a:bodyPr rtlCol="0" anchor="ctr"/>
+          <a:lstStyle/>
+          <a:p>
+            <a:pPr algn="ctr"/>
+          </a:p>
+        </p:txBody>
+      </p:sp>
       <p:pic>
         <p:nvPicPr>
-          <p:cNvPr id="19" name="Picture 18" descr="check_steel.png"/>
+          <p:cNvPr id="24" name="Picture 23" descr="check_white.png"/>
           <p:cNvPicPr>
             <a:picLocks noChangeAspect="1"/>
           </p:cNvPicPr>
@@ -6978,8 +7831,8 @@
         </p:blipFill>
         <p:spPr>
           <a:xfrm>
-            <a:off x="987552" y="4956048"/>
-            <a:ext cx="237744" cy="237744"/>
+            <a:off x="1110447" y="4521159"/>
+            <a:ext cx="266273" cy="266273"/>
           </a:xfrm>
           <a:prstGeom prst="rect">
             <a:avLst/>
@@ -6988,14 +7841,14 @@
       </p:pic>
       <p:sp>
         <p:nvSpPr>
-          <p:cNvPr id="20" name="TextBox 19"/>
+          <p:cNvPr id="25" name="TextBox 24"/>
           <p:cNvSpPr txBox="1"/>
           <p:nvPr/>
         </p:nvSpPr>
         <p:spPr>
           <a:xfrm>
-            <a:off x="1353312" y="4809744"/>
-            <a:ext cx="5029200" cy="530352"/>
+            <a:off x="1627632" y="4261104"/>
+            <a:ext cx="4206240" cy="786384"/>
           </a:xfrm>
           <a:prstGeom prst="rect">
             <a:avLst/>
@@ -7020,221 +7873,13 @@
               </a:spcAft>
             </a:pPr>
             <a:r>
-              <a:rPr sz="1200" b="0">
+              <a:rPr sz="1150" b="0">
                 <a:solidFill>
                   <a:srgbClr val="1A1A1A"/>
                 </a:solidFill>
                 <a:latin typeface="Red Hat Text"/>
               </a:rPr>
               <a:t>The right thing is the easy thing</a:t>
-            </a:r>
-          </a:p>
-        </p:txBody>
-      </p:sp>
-      <p:sp>
-        <p:nvSpPr>
-          <p:cNvPr id="21" name="Rounded Rectangle 20"/>
-          <p:cNvSpPr/>
-          <p:nvPr/>
-        </p:nvSpPr>
-        <p:spPr>
-          <a:xfrm>
-            <a:off x="6812280" y="2395728"/>
-            <a:ext cx="4538167" cy="2944368"/>
-          </a:xfrm>
-          <a:prstGeom prst="roundRect">
-            <a:avLst>
-              <a:gd name="adj" fmla="val 4000"/>
-            </a:avLst>
-          </a:prstGeom>
-          <a:solidFill>
-            <a:srgbClr val="FFFFFF"/>
-          </a:solidFill>
-          <a:ln w="15240">
-            <a:solidFill>
-              <a:srgbClr val="DDE1E6"/>
-            </a:solidFill>
-          </a:ln>
-          <a:effectLst/>
-        </p:spPr>
-        <p:style>
-          <a:lnRef idx="1">
-            <a:schemeClr val="accent1"/>
-          </a:lnRef>
-          <a:fillRef idx="3">
-            <a:schemeClr val="accent1"/>
-          </a:fillRef>
-          <a:effectRef idx="2">
-            <a:schemeClr val="accent1"/>
-          </a:effectRef>
-          <a:fontRef idx="minor">
-            <a:schemeClr val="lt1"/>
-          </a:fontRef>
-        </p:style>
-        <p:txBody>
-          <a:bodyPr rtlCol="0" anchor="ctr"/>
-          <a:lstStyle/>
-          <a:p>
-            <a:pPr algn="ctr"/>
-          </a:p>
-        </p:txBody>
-      </p:sp>
-      <p:sp>
-        <p:nvSpPr>
-          <p:cNvPr id="22" name="Rounded Rectangle 21"/>
-          <p:cNvSpPr/>
-          <p:nvPr/>
-        </p:nvSpPr>
-        <p:spPr>
-          <a:xfrm>
-            <a:off x="7013448" y="2596896"/>
-            <a:ext cx="1298448" cy="310896"/>
-          </a:xfrm>
-          <a:prstGeom prst="roundRect">
-            <a:avLst>
-              <a:gd name="adj" fmla="val 50000"/>
-            </a:avLst>
-          </a:prstGeom>
-          <a:solidFill>
-            <a:srgbClr val="FCECEC"/>
-          </a:solidFill>
-          <a:ln>
-            <a:noFill/>
-          </a:ln>
-          <a:effectLst/>
-        </p:spPr>
-        <p:style>
-          <a:lnRef idx="1">
-            <a:schemeClr val="accent1"/>
-          </a:lnRef>
-          <a:fillRef idx="3">
-            <a:schemeClr val="accent1"/>
-          </a:fillRef>
-          <a:effectRef idx="2">
-            <a:schemeClr val="accent1"/>
-          </a:effectRef>
-          <a:fontRef idx="minor">
-            <a:schemeClr val="lt1"/>
-          </a:fontRef>
-        </p:style>
-        <p:txBody>
-          <a:bodyPr rtlCol="0" anchor="ctr"/>
-          <a:lstStyle/>
-          <a:p>
-            <a:pPr algn="ctr"/>
-          </a:p>
-        </p:txBody>
-      </p:sp>
-      <p:sp>
-        <p:nvSpPr>
-          <p:cNvPr id="23" name="TextBox 22"/>
-          <p:cNvSpPr txBox="1"/>
-          <p:nvPr/>
-        </p:nvSpPr>
-        <p:spPr>
-          <a:xfrm>
-            <a:off x="7013448" y="2596896"/>
-            <a:ext cx="1298448" cy="310896"/>
-          </a:xfrm>
-          <a:prstGeom prst="rect">
-            <a:avLst/>
-          </a:prstGeom>
-          <a:noFill/>
-        </p:spPr>
-        <p:txBody>
-          <a:bodyPr wrap="none" anchor="ctr" lIns="0" rIns="0" tIns="0" bIns="0">
-            <a:spAutoFit/>
-          </a:bodyPr>
-          <a:lstStyle/>
-          <a:p>
-            <a:pPr algn="ctr">
-              <a:lnSpc>
-                <a:spcPct val="106000"/>
-              </a:lnSpc>
-              <a:spcBef>
-                <a:spcPts val="0"/>
-              </a:spcBef>
-              <a:spcAft>
-                <a:spcPts val="0"/>
-              </a:spcAft>
-            </a:pPr>
-            <a:r>
-              <a:rPr sz="850" b="1">
-                <a:solidFill>
-                  <a:srgbClr val="B80000"/>
-                </a:solidFill>
-                <a:latin typeface="Red Hat Display"/>
-              </a:rPr>
-              <a:t>MEDIA PASS</a:t>
-            </a:r>
-          </a:p>
-        </p:txBody>
-      </p:sp>
-      <p:pic>
-        <p:nvPicPr>
-          <p:cNvPr id="24" name="Picture 23" descr="eye_slate.png"/>
-          <p:cNvPicPr>
-            <a:picLocks noChangeAspect="1"/>
-          </p:cNvPicPr>
-          <p:nvPr/>
-        </p:nvPicPr>
-        <p:blipFill>
-          <a:blip r:embed="rId4"/>
-          <a:stretch>
-            <a:fillRect/>
-          </a:stretch>
-        </p:blipFill>
-        <p:spPr>
-          <a:xfrm>
-            <a:off x="8843619" y="3108960"/>
-            <a:ext cx="475488" cy="475488"/>
-          </a:xfrm>
-          <a:prstGeom prst="rect">
-            <a:avLst/>
-          </a:prstGeom>
-        </p:spPr>
-      </p:pic>
-      <p:sp>
-        <p:nvSpPr>
-          <p:cNvPr id="25" name="TextBox 24"/>
-          <p:cNvSpPr txBox="1"/>
-          <p:nvPr/>
-        </p:nvSpPr>
-        <p:spPr>
-          <a:xfrm>
-            <a:off x="7050024" y="3721608"/>
-            <a:ext cx="4062679" cy="1481328"/>
-          </a:xfrm>
-          <a:prstGeom prst="rect">
-            <a:avLst/>
-          </a:prstGeom>
-          <a:noFill/>
-        </p:spPr>
-        <p:txBody>
-          <a:bodyPr wrap="square" anchor="t" lIns="0" rIns="0" tIns="0" bIns="0">
-            <a:spAutoFit/>
-          </a:bodyPr>
-          <a:lstStyle/>
-          <a:p>
-            <a:pPr algn="l">
-              <a:lnSpc>
-                <a:spcPct val="120000"/>
-              </a:lnSpc>
-              <a:spcBef>
-                <a:spcPts val="0"/>
-              </a:spcBef>
-              <a:spcAft>
-                <a:spcPts val="0"/>
-              </a:spcAft>
-            </a:pPr>
-            <a:r>
-              <a:rPr sz="950" b="0">
-                <a:solidFill>
-                  <a:srgbClr val="8A9099"/>
-                </a:solidFill>
-                <a:latin typeface="Red Hat Text"/>
-              </a:rPr>
-              <a:t>Concept diagram developer-hub-golden-paths-02-golden-path-flow — form → template → three outputs (scaffold skeleton, publish to Git, register in catalog) → a new repo + a catalog entry.</a:t>
             </a:r>
           </a:p>
         </p:txBody>
@@ -7542,11 +8187,11 @@
         <p:spPr>
           <a:xfrm>
             <a:off x="841248" y="2395728"/>
-            <a:ext cx="5715000" cy="530352"/>
+            <a:ext cx="5138928" cy="786384"/>
           </a:xfrm>
           <a:prstGeom prst="roundRect">
             <a:avLst>
-              <a:gd name="adj" fmla="val 6000"/>
+              <a:gd name="adj" fmla="val 7000"/>
             </a:avLst>
           </a:prstGeom>
           <a:solidFill>
@@ -7581,9 +8226,55 @@
           </a:p>
         </p:txBody>
       </p:sp>
+      <p:sp>
+        <p:nvSpPr>
+          <p:cNvPr id="7" name="Rounded Rectangle 6"/>
+          <p:cNvSpPr/>
+          <p:nvPr/>
+        </p:nvSpPr>
+        <p:spPr>
+          <a:xfrm>
+            <a:off x="987552" y="2532888"/>
+            <a:ext cx="512064" cy="512064"/>
+          </a:xfrm>
+          <a:prstGeom prst="roundRect">
+            <a:avLst>
+              <a:gd name="adj" fmla="val 26000"/>
+            </a:avLst>
+          </a:prstGeom>
+          <a:solidFill>
+            <a:srgbClr val="EE0000"/>
+          </a:solidFill>
+          <a:ln>
+            <a:noFill/>
+          </a:ln>
+          <a:effectLst/>
+        </p:spPr>
+        <p:style>
+          <a:lnRef idx="1">
+            <a:schemeClr val="accent1"/>
+          </a:lnRef>
+          <a:fillRef idx="3">
+            <a:schemeClr val="accent1"/>
+          </a:fillRef>
+          <a:effectRef idx="2">
+            <a:schemeClr val="accent1"/>
+          </a:effectRef>
+          <a:fontRef idx="minor">
+            <a:schemeClr val="lt1"/>
+          </a:fontRef>
+        </p:style>
+        <p:txBody>
+          <a:bodyPr rtlCol="0" anchor="ctr"/>
+          <a:lstStyle/>
+          <a:p>
+            <a:pPr algn="ctr"/>
+          </a:p>
+        </p:txBody>
+      </p:sp>
       <p:pic>
         <p:nvPicPr>
-          <p:cNvPr id="7" name="Picture 6" descr="check_steel.png"/>
+          <p:cNvPr id="8" name="Picture 7" descr="check_white.png"/>
           <p:cNvPicPr>
             <a:picLocks noChangeAspect="1"/>
           </p:cNvPicPr>
@@ -7597,8 +8288,8 @@
         </p:blipFill>
         <p:spPr>
           <a:xfrm>
-            <a:off x="987552" y="2542032"/>
-            <a:ext cx="237744" cy="237744"/>
+            <a:off x="1110447" y="2655783"/>
+            <a:ext cx="266273" cy="266273"/>
           </a:xfrm>
           <a:prstGeom prst="rect">
             <a:avLst/>
@@ -7607,14 +8298,14 @@
       </p:pic>
       <p:sp>
         <p:nvSpPr>
-          <p:cNvPr id="8" name="TextBox 7"/>
+          <p:cNvPr id="9" name="TextBox 8"/>
           <p:cNvSpPr txBox="1"/>
           <p:nvPr/>
         </p:nvSpPr>
         <p:spPr>
           <a:xfrm>
-            <a:off x="1353312" y="2395728"/>
-            <a:ext cx="5029200" cy="530352"/>
+            <a:off x="1627632" y="2395728"/>
+            <a:ext cx="4206240" cy="786384"/>
           </a:xfrm>
           <a:prstGeom prst="rect">
             <a:avLst/>
@@ -7639,7 +8330,7 @@
               </a:spcAft>
             </a:pPr>
             <a:r>
-              <a:rPr sz="1200" b="0">
+              <a:rPr sz="1150" b="0">
                 <a:solidFill>
                   <a:srgbClr val="1A1A1A"/>
                 </a:solidFill>
@@ -7652,18 +8343,18 @@
       </p:sp>
       <p:sp>
         <p:nvSpPr>
-          <p:cNvPr id="9" name="Rounded Rectangle 8"/>
+          <p:cNvPr id="10" name="Rounded Rectangle 9"/>
           <p:cNvSpPr/>
           <p:nvPr/>
         </p:nvSpPr>
         <p:spPr>
           <a:xfrm>
-            <a:off x="841248" y="2999232"/>
-            <a:ext cx="5715000" cy="530352"/>
+            <a:off x="6254496" y="2395728"/>
+            <a:ext cx="5138928" cy="786384"/>
           </a:xfrm>
           <a:prstGeom prst="roundRect">
             <a:avLst>
-              <a:gd name="adj" fmla="val 6000"/>
+              <a:gd name="adj" fmla="val 7000"/>
             </a:avLst>
           </a:prstGeom>
           <a:solidFill>
@@ -7698,9 +8389,55 @@
           </a:p>
         </p:txBody>
       </p:sp>
+      <p:sp>
+        <p:nvSpPr>
+          <p:cNvPr id="11" name="Rounded Rectangle 10"/>
+          <p:cNvSpPr/>
+          <p:nvPr/>
+        </p:nvSpPr>
+        <p:spPr>
+          <a:xfrm>
+            <a:off x="6400800" y="2532888"/>
+            <a:ext cx="512064" cy="512064"/>
+          </a:xfrm>
+          <a:prstGeom prst="roundRect">
+            <a:avLst>
+              <a:gd name="adj" fmla="val 26000"/>
+            </a:avLst>
+          </a:prstGeom>
+          <a:solidFill>
+            <a:srgbClr val="EE0000"/>
+          </a:solidFill>
+          <a:ln>
+            <a:noFill/>
+          </a:ln>
+          <a:effectLst/>
+        </p:spPr>
+        <p:style>
+          <a:lnRef idx="1">
+            <a:schemeClr val="accent1"/>
+          </a:lnRef>
+          <a:fillRef idx="3">
+            <a:schemeClr val="accent1"/>
+          </a:fillRef>
+          <a:effectRef idx="2">
+            <a:schemeClr val="accent1"/>
+          </a:effectRef>
+          <a:fontRef idx="minor">
+            <a:schemeClr val="lt1"/>
+          </a:fontRef>
+        </p:style>
+        <p:txBody>
+          <a:bodyPr rtlCol="0" anchor="ctr"/>
+          <a:lstStyle/>
+          <a:p>
+            <a:pPr algn="ctr"/>
+          </a:p>
+        </p:txBody>
+      </p:sp>
       <p:pic>
         <p:nvPicPr>
-          <p:cNvPr id="10" name="Picture 9" descr="check_steel.png"/>
+          <p:cNvPr id="12" name="Picture 11" descr="check_white.png"/>
           <p:cNvPicPr>
             <a:picLocks noChangeAspect="1"/>
           </p:cNvPicPr>
@@ -7714,8 +8451,8 @@
         </p:blipFill>
         <p:spPr>
           <a:xfrm>
-            <a:off x="987552" y="3145536"/>
-            <a:ext cx="237744" cy="237744"/>
+            <a:off x="6523695" y="2655783"/>
+            <a:ext cx="266273" cy="266273"/>
           </a:xfrm>
           <a:prstGeom prst="rect">
             <a:avLst/>
@@ -7724,14 +8461,14 @@
       </p:pic>
       <p:sp>
         <p:nvSpPr>
-          <p:cNvPr id="11" name="TextBox 10"/>
+          <p:cNvPr id="13" name="TextBox 12"/>
           <p:cNvSpPr txBox="1"/>
           <p:nvPr/>
         </p:nvSpPr>
         <p:spPr>
           <a:xfrm>
-            <a:off x="1353312" y="2999232"/>
-            <a:ext cx="5029200" cy="530352"/>
+            <a:off x="7040880" y="2395728"/>
+            <a:ext cx="4206240" cy="786384"/>
           </a:xfrm>
           <a:prstGeom prst="rect">
             <a:avLst/>
@@ -7756,7 +8493,7 @@
               </a:spcAft>
             </a:pPr>
             <a:r>
-              <a:rPr sz="1200" b="0">
+              <a:rPr sz="1150" b="0">
                 <a:solidFill>
                   <a:srgbClr val="1A1A1A"/>
                 </a:solidFill>
@@ -7769,18 +8506,18 @@
       </p:sp>
       <p:sp>
         <p:nvSpPr>
-          <p:cNvPr id="12" name="Rounded Rectangle 11"/>
+          <p:cNvPr id="14" name="Rounded Rectangle 13"/>
           <p:cNvSpPr/>
           <p:nvPr/>
         </p:nvSpPr>
         <p:spPr>
           <a:xfrm>
-            <a:off x="841248" y="3602736"/>
-            <a:ext cx="5715000" cy="530352"/>
+            <a:off x="841248" y="3328416"/>
+            <a:ext cx="5138928" cy="786384"/>
           </a:xfrm>
           <a:prstGeom prst="roundRect">
             <a:avLst>
-              <a:gd name="adj" fmla="val 6000"/>
+              <a:gd name="adj" fmla="val 7000"/>
             </a:avLst>
           </a:prstGeom>
           <a:solidFill>
@@ -7815,9 +8552,55 @@
           </a:p>
         </p:txBody>
       </p:sp>
+      <p:sp>
+        <p:nvSpPr>
+          <p:cNvPr id="15" name="Rounded Rectangle 14"/>
+          <p:cNvSpPr/>
+          <p:nvPr/>
+        </p:nvSpPr>
+        <p:spPr>
+          <a:xfrm>
+            <a:off x="987552" y="3465576"/>
+            <a:ext cx="512064" cy="512064"/>
+          </a:xfrm>
+          <a:prstGeom prst="roundRect">
+            <a:avLst>
+              <a:gd name="adj" fmla="val 26000"/>
+            </a:avLst>
+          </a:prstGeom>
+          <a:solidFill>
+            <a:srgbClr val="EE0000"/>
+          </a:solidFill>
+          <a:ln>
+            <a:noFill/>
+          </a:ln>
+          <a:effectLst/>
+        </p:spPr>
+        <p:style>
+          <a:lnRef idx="1">
+            <a:schemeClr val="accent1"/>
+          </a:lnRef>
+          <a:fillRef idx="3">
+            <a:schemeClr val="accent1"/>
+          </a:fillRef>
+          <a:effectRef idx="2">
+            <a:schemeClr val="accent1"/>
+          </a:effectRef>
+          <a:fontRef idx="minor">
+            <a:schemeClr val="lt1"/>
+          </a:fontRef>
+        </p:style>
+        <p:txBody>
+          <a:bodyPr rtlCol="0" anchor="ctr"/>
+          <a:lstStyle/>
+          <a:p>
+            <a:pPr algn="ctr"/>
+          </a:p>
+        </p:txBody>
+      </p:sp>
       <p:pic>
         <p:nvPicPr>
-          <p:cNvPr id="13" name="Picture 12" descr="check_steel.png"/>
+          <p:cNvPr id="16" name="Picture 15" descr="check_white.png"/>
           <p:cNvPicPr>
             <a:picLocks noChangeAspect="1"/>
           </p:cNvPicPr>
@@ -7831,8 +8614,8 @@
         </p:blipFill>
         <p:spPr>
           <a:xfrm>
-            <a:off x="987552" y="3749040"/>
-            <a:ext cx="237744" cy="237744"/>
+            <a:off x="1110447" y="3588471"/>
+            <a:ext cx="266273" cy="266273"/>
           </a:xfrm>
           <a:prstGeom prst="rect">
             <a:avLst/>
@@ -7841,14 +8624,14 @@
       </p:pic>
       <p:sp>
         <p:nvSpPr>
-          <p:cNvPr id="14" name="TextBox 13"/>
+          <p:cNvPr id="17" name="TextBox 16"/>
           <p:cNvSpPr txBox="1"/>
           <p:nvPr/>
         </p:nvSpPr>
         <p:spPr>
           <a:xfrm>
-            <a:off x="1353312" y="3602736"/>
-            <a:ext cx="5029200" cy="530352"/>
+            <a:off x="1627632" y="3328416"/>
+            <a:ext cx="4206240" cy="786384"/>
           </a:xfrm>
           <a:prstGeom prst="rect">
             <a:avLst/>
@@ -7873,7 +8656,7 @@
               </a:spcAft>
             </a:pPr>
             <a:r>
-              <a:rPr sz="1200" b="0">
+              <a:rPr sz="1150" b="0">
                 <a:solidFill>
                   <a:srgbClr val="1A1A1A"/>
                 </a:solidFill>
@@ -7886,18 +8669,18 @@
       </p:sp>
       <p:sp>
         <p:nvSpPr>
-          <p:cNvPr id="15" name="Rounded Rectangle 14"/>
+          <p:cNvPr id="18" name="Rounded Rectangle 17"/>
           <p:cNvSpPr/>
           <p:nvPr/>
         </p:nvSpPr>
         <p:spPr>
           <a:xfrm>
-            <a:off x="841248" y="4206240"/>
-            <a:ext cx="5715000" cy="530352"/>
+            <a:off x="6254496" y="3328416"/>
+            <a:ext cx="5138928" cy="786384"/>
           </a:xfrm>
           <a:prstGeom prst="roundRect">
             <a:avLst>
-              <a:gd name="adj" fmla="val 6000"/>
+              <a:gd name="adj" fmla="val 7000"/>
             </a:avLst>
           </a:prstGeom>
           <a:solidFill>
@@ -7932,9 +8715,55 @@
           </a:p>
         </p:txBody>
       </p:sp>
+      <p:sp>
+        <p:nvSpPr>
+          <p:cNvPr id="19" name="Rounded Rectangle 18"/>
+          <p:cNvSpPr/>
+          <p:nvPr/>
+        </p:nvSpPr>
+        <p:spPr>
+          <a:xfrm>
+            <a:off x="6400800" y="3465576"/>
+            <a:ext cx="512064" cy="512064"/>
+          </a:xfrm>
+          <a:prstGeom prst="roundRect">
+            <a:avLst>
+              <a:gd name="adj" fmla="val 26000"/>
+            </a:avLst>
+          </a:prstGeom>
+          <a:solidFill>
+            <a:srgbClr val="EE0000"/>
+          </a:solidFill>
+          <a:ln>
+            <a:noFill/>
+          </a:ln>
+          <a:effectLst/>
+        </p:spPr>
+        <p:style>
+          <a:lnRef idx="1">
+            <a:schemeClr val="accent1"/>
+          </a:lnRef>
+          <a:fillRef idx="3">
+            <a:schemeClr val="accent1"/>
+          </a:fillRef>
+          <a:effectRef idx="2">
+            <a:schemeClr val="accent1"/>
+          </a:effectRef>
+          <a:fontRef idx="minor">
+            <a:schemeClr val="lt1"/>
+          </a:fontRef>
+        </p:style>
+        <p:txBody>
+          <a:bodyPr rtlCol="0" anchor="ctr"/>
+          <a:lstStyle/>
+          <a:p>
+            <a:pPr algn="ctr"/>
+          </a:p>
+        </p:txBody>
+      </p:sp>
       <p:pic>
         <p:nvPicPr>
-          <p:cNvPr id="16" name="Picture 15" descr="check_steel.png"/>
+          <p:cNvPr id="20" name="Picture 19" descr="check_white.png"/>
           <p:cNvPicPr>
             <a:picLocks noChangeAspect="1"/>
           </p:cNvPicPr>
@@ -7948,8 +8777,8 @@
         </p:blipFill>
         <p:spPr>
           <a:xfrm>
-            <a:off x="987552" y="4352544"/>
-            <a:ext cx="237744" cy="237744"/>
+            <a:off x="6523695" y="3588471"/>
+            <a:ext cx="266273" cy="266273"/>
           </a:xfrm>
           <a:prstGeom prst="rect">
             <a:avLst/>
@@ -7958,14 +8787,14 @@
       </p:pic>
       <p:sp>
         <p:nvSpPr>
-          <p:cNvPr id="17" name="TextBox 16"/>
+          <p:cNvPr id="21" name="TextBox 20"/>
           <p:cNvSpPr txBox="1"/>
           <p:nvPr/>
         </p:nvSpPr>
         <p:spPr>
           <a:xfrm>
-            <a:off x="1353312" y="4206240"/>
-            <a:ext cx="5029200" cy="530352"/>
+            <a:off x="7040880" y="3328416"/>
+            <a:ext cx="4206240" cy="786384"/>
           </a:xfrm>
           <a:prstGeom prst="rect">
             <a:avLst/>
@@ -7990,7 +8819,7 @@
               </a:spcAft>
             </a:pPr>
             <a:r>
-              <a:rPr sz="1200" b="0">
+              <a:rPr sz="1150" b="0">
                 <a:solidFill>
                   <a:srgbClr val="1A1A1A"/>
                 </a:solidFill>
@@ -8003,18 +8832,18 @@
       </p:sp>
       <p:sp>
         <p:nvSpPr>
-          <p:cNvPr id="18" name="Rounded Rectangle 17"/>
+          <p:cNvPr id="22" name="Rounded Rectangle 21"/>
           <p:cNvSpPr/>
           <p:nvPr/>
         </p:nvSpPr>
         <p:spPr>
           <a:xfrm>
-            <a:off x="841248" y="4809744"/>
-            <a:ext cx="5715000" cy="530352"/>
+            <a:off x="841248" y="4261104"/>
+            <a:ext cx="5138928" cy="786384"/>
           </a:xfrm>
           <a:prstGeom prst="roundRect">
             <a:avLst>
-              <a:gd name="adj" fmla="val 6000"/>
+              <a:gd name="adj" fmla="val 7000"/>
             </a:avLst>
           </a:prstGeom>
           <a:solidFill>
@@ -8049,9 +8878,55 @@
           </a:p>
         </p:txBody>
       </p:sp>
+      <p:sp>
+        <p:nvSpPr>
+          <p:cNvPr id="23" name="Rounded Rectangle 22"/>
+          <p:cNvSpPr/>
+          <p:nvPr/>
+        </p:nvSpPr>
+        <p:spPr>
+          <a:xfrm>
+            <a:off x="987552" y="4398264"/>
+            <a:ext cx="512064" cy="512064"/>
+          </a:xfrm>
+          <a:prstGeom prst="roundRect">
+            <a:avLst>
+              <a:gd name="adj" fmla="val 26000"/>
+            </a:avLst>
+          </a:prstGeom>
+          <a:solidFill>
+            <a:srgbClr val="EE0000"/>
+          </a:solidFill>
+          <a:ln>
+            <a:noFill/>
+          </a:ln>
+          <a:effectLst/>
+        </p:spPr>
+        <p:style>
+          <a:lnRef idx="1">
+            <a:schemeClr val="accent1"/>
+          </a:lnRef>
+          <a:fillRef idx="3">
+            <a:schemeClr val="accent1"/>
+          </a:fillRef>
+          <a:effectRef idx="2">
+            <a:schemeClr val="accent1"/>
+          </a:effectRef>
+          <a:fontRef idx="minor">
+            <a:schemeClr val="lt1"/>
+          </a:fontRef>
+        </p:style>
+        <p:txBody>
+          <a:bodyPr rtlCol="0" anchor="ctr"/>
+          <a:lstStyle/>
+          <a:p>
+            <a:pPr algn="ctr"/>
+          </a:p>
+        </p:txBody>
+      </p:sp>
       <p:pic>
         <p:nvPicPr>
-          <p:cNvPr id="19" name="Picture 18" descr="check_steel.png"/>
+          <p:cNvPr id="24" name="Picture 23" descr="check_white.png"/>
           <p:cNvPicPr>
             <a:picLocks noChangeAspect="1"/>
           </p:cNvPicPr>
@@ -8065,8 +8940,8 @@
         </p:blipFill>
         <p:spPr>
           <a:xfrm>
-            <a:off x="987552" y="4956048"/>
-            <a:ext cx="237744" cy="237744"/>
+            <a:off x="1110447" y="4521159"/>
+            <a:ext cx="266273" cy="266273"/>
           </a:xfrm>
           <a:prstGeom prst="rect">
             <a:avLst/>
@@ -8075,14 +8950,14 @@
       </p:pic>
       <p:sp>
         <p:nvSpPr>
-          <p:cNvPr id="20" name="TextBox 19"/>
+          <p:cNvPr id="25" name="TextBox 24"/>
           <p:cNvSpPr txBox="1"/>
           <p:nvPr/>
         </p:nvSpPr>
         <p:spPr>
           <a:xfrm>
-            <a:off x="1353312" y="4809744"/>
-            <a:ext cx="5029200" cy="530352"/>
+            <a:off x="1627632" y="4261104"/>
+            <a:ext cx="4206240" cy="786384"/>
           </a:xfrm>
           <a:prstGeom prst="rect">
             <a:avLst/>
@@ -8107,221 +8982,13 @@
               </a:spcAft>
             </a:pPr>
             <a:r>
-              <a:rPr sz="1200" b="0">
+              <a:rPr sz="1150" b="0">
                 <a:solidFill>
                   <a:srgbClr val="1A1A1A"/>
                 </a:solidFill>
                 <a:latin typeface="Red Hat Text"/>
               </a:rPr>
               <a:t>Improve the template once, every future service gains</a:t>
-            </a:r>
-          </a:p>
-        </p:txBody>
-      </p:sp>
-      <p:sp>
-        <p:nvSpPr>
-          <p:cNvPr id="21" name="Rounded Rectangle 20"/>
-          <p:cNvSpPr/>
-          <p:nvPr/>
-        </p:nvSpPr>
-        <p:spPr>
-          <a:xfrm>
-            <a:off x="6812280" y="2395728"/>
-            <a:ext cx="4538167" cy="2944368"/>
-          </a:xfrm>
-          <a:prstGeom prst="roundRect">
-            <a:avLst>
-              <a:gd name="adj" fmla="val 4000"/>
-            </a:avLst>
-          </a:prstGeom>
-          <a:solidFill>
-            <a:srgbClr val="FFFFFF"/>
-          </a:solidFill>
-          <a:ln w="15240">
-            <a:solidFill>
-              <a:srgbClr val="DDE1E6"/>
-            </a:solidFill>
-          </a:ln>
-          <a:effectLst/>
-        </p:spPr>
-        <p:style>
-          <a:lnRef idx="1">
-            <a:schemeClr val="accent1"/>
-          </a:lnRef>
-          <a:fillRef idx="3">
-            <a:schemeClr val="accent1"/>
-          </a:fillRef>
-          <a:effectRef idx="2">
-            <a:schemeClr val="accent1"/>
-          </a:effectRef>
-          <a:fontRef idx="minor">
-            <a:schemeClr val="lt1"/>
-          </a:fontRef>
-        </p:style>
-        <p:txBody>
-          <a:bodyPr rtlCol="0" anchor="ctr"/>
-          <a:lstStyle/>
-          <a:p>
-            <a:pPr algn="ctr"/>
-          </a:p>
-        </p:txBody>
-      </p:sp>
-      <p:sp>
-        <p:nvSpPr>
-          <p:cNvPr id="22" name="Rounded Rectangle 21"/>
-          <p:cNvSpPr/>
-          <p:nvPr/>
-        </p:nvSpPr>
-        <p:spPr>
-          <a:xfrm>
-            <a:off x="7013448" y="2596896"/>
-            <a:ext cx="1298448" cy="310896"/>
-          </a:xfrm>
-          <a:prstGeom prst="roundRect">
-            <a:avLst>
-              <a:gd name="adj" fmla="val 50000"/>
-            </a:avLst>
-          </a:prstGeom>
-          <a:solidFill>
-            <a:srgbClr val="FCECEC"/>
-          </a:solidFill>
-          <a:ln>
-            <a:noFill/>
-          </a:ln>
-          <a:effectLst/>
-        </p:spPr>
-        <p:style>
-          <a:lnRef idx="1">
-            <a:schemeClr val="accent1"/>
-          </a:lnRef>
-          <a:fillRef idx="3">
-            <a:schemeClr val="accent1"/>
-          </a:fillRef>
-          <a:effectRef idx="2">
-            <a:schemeClr val="accent1"/>
-          </a:effectRef>
-          <a:fontRef idx="minor">
-            <a:schemeClr val="lt1"/>
-          </a:fontRef>
-        </p:style>
-        <p:txBody>
-          <a:bodyPr rtlCol="0" anchor="ctr"/>
-          <a:lstStyle/>
-          <a:p>
-            <a:pPr algn="ctr"/>
-          </a:p>
-        </p:txBody>
-      </p:sp>
-      <p:sp>
-        <p:nvSpPr>
-          <p:cNvPr id="23" name="TextBox 22"/>
-          <p:cNvSpPr txBox="1"/>
-          <p:nvPr/>
-        </p:nvSpPr>
-        <p:spPr>
-          <a:xfrm>
-            <a:off x="7013448" y="2596896"/>
-            <a:ext cx="1298448" cy="310896"/>
-          </a:xfrm>
-          <a:prstGeom prst="rect">
-            <a:avLst/>
-          </a:prstGeom>
-          <a:noFill/>
-        </p:spPr>
-        <p:txBody>
-          <a:bodyPr wrap="none" anchor="ctr" lIns="0" rIns="0" tIns="0" bIns="0">
-            <a:spAutoFit/>
-          </a:bodyPr>
-          <a:lstStyle/>
-          <a:p>
-            <a:pPr algn="ctr">
-              <a:lnSpc>
-                <a:spcPct val="106000"/>
-              </a:lnSpc>
-              <a:spcBef>
-                <a:spcPts val="0"/>
-              </a:spcBef>
-              <a:spcAft>
-                <a:spcPts val="0"/>
-              </a:spcAft>
-            </a:pPr>
-            <a:r>
-              <a:rPr sz="850" b="1">
-                <a:solidFill>
-                  <a:srgbClr val="B80000"/>
-                </a:solidFill>
-                <a:latin typeface="Red Hat Display"/>
-              </a:rPr>
-              <a:t>MEDIA PASS</a:t>
-            </a:r>
-          </a:p>
-        </p:txBody>
-      </p:sp>
-      <p:pic>
-        <p:nvPicPr>
-          <p:cNvPr id="24" name="Picture 23" descr="eye_slate.png"/>
-          <p:cNvPicPr>
-            <a:picLocks noChangeAspect="1"/>
-          </p:cNvPicPr>
-          <p:nvPr/>
-        </p:nvPicPr>
-        <p:blipFill>
-          <a:blip r:embed="rId4"/>
-          <a:stretch>
-            <a:fillRect/>
-          </a:stretch>
-        </p:blipFill>
-        <p:spPr>
-          <a:xfrm>
-            <a:off x="8843619" y="3108960"/>
-            <a:ext cx="475488" cy="475488"/>
-          </a:xfrm>
-          <a:prstGeom prst="rect">
-            <a:avLst/>
-          </a:prstGeom>
-        </p:spPr>
-      </p:pic>
-      <p:sp>
-        <p:nvSpPr>
-          <p:cNvPr id="25" name="TextBox 24"/>
-          <p:cNvSpPr txBox="1"/>
-          <p:nvPr/>
-        </p:nvSpPr>
-        <p:spPr>
-          <a:xfrm>
-            <a:off x="7050024" y="3721608"/>
-            <a:ext cx="4062679" cy="1481328"/>
-          </a:xfrm>
-          <a:prstGeom prst="rect">
-            <a:avLst/>
-          </a:prstGeom>
-          <a:noFill/>
-        </p:spPr>
-        <p:txBody>
-          <a:bodyPr wrap="square" anchor="t" lIns="0" rIns="0" tIns="0" bIns="0">
-            <a:spAutoFit/>
-          </a:bodyPr>
-          <a:lstStyle/>
-          <a:p>
-            <a:pPr algn="l">
-              <a:lnSpc>
-                <a:spcPct val="120000"/>
-              </a:lnSpc>
-              <a:spcBef>
-                <a:spcPts val="0"/>
-              </a:spcBef>
-              <a:spcAft>
-                <a:spcPts val="0"/>
-              </a:spcAft>
-            </a:pPr>
-            <a:r>
-              <a:rPr sz="950" b="0">
-                <a:solidFill>
-                  <a:srgbClr val="8A9099"/>
-                </a:solidFill>
-                <a:latin typeface="Red Hat Text"/>
-              </a:rPr>
-              <a:t>A single glowing "Create" button on the left; on the right, a stack of labelled layers (trusted image, probes, metrics, tracing, catalog entry, build recipe) assembling into one service card — with a small bracket over the accreted platform layers.</a:t>
             </a:r>
           </a:p>
         </p:txBody>
@@ -8629,11 +9296,11 @@
         <p:spPr>
           <a:xfrm>
             <a:off x="841248" y="2395728"/>
-            <a:ext cx="5715000" cy="530352"/>
+            <a:ext cx="5138928" cy="786384"/>
           </a:xfrm>
           <a:prstGeom prst="roundRect">
             <a:avLst>
-              <a:gd name="adj" fmla="val 6000"/>
+              <a:gd name="adj" fmla="val 7000"/>
             </a:avLst>
           </a:prstGeom>
           <a:solidFill>
@@ -8668,9 +9335,55 @@
           </a:p>
         </p:txBody>
       </p:sp>
+      <p:sp>
+        <p:nvSpPr>
+          <p:cNvPr id="7" name="Rounded Rectangle 6"/>
+          <p:cNvSpPr/>
+          <p:nvPr/>
+        </p:nvSpPr>
+        <p:spPr>
+          <a:xfrm>
+            <a:off x="987552" y="2532888"/>
+            <a:ext cx="512064" cy="512064"/>
+          </a:xfrm>
+          <a:prstGeom prst="roundRect">
+            <a:avLst>
+              <a:gd name="adj" fmla="val 26000"/>
+            </a:avLst>
+          </a:prstGeom>
+          <a:solidFill>
+            <a:srgbClr val="EE0000"/>
+          </a:solidFill>
+          <a:ln>
+            <a:noFill/>
+          </a:ln>
+          <a:effectLst/>
+        </p:spPr>
+        <p:style>
+          <a:lnRef idx="1">
+            <a:schemeClr val="accent1"/>
+          </a:lnRef>
+          <a:fillRef idx="3">
+            <a:schemeClr val="accent1"/>
+          </a:fillRef>
+          <a:effectRef idx="2">
+            <a:schemeClr val="accent1"/>
+          </a:effectRef>
+          <a:fontRef idx="minor">
+            <a:schemeClr val="lt1"/>
+          </a:fontRef>
+        </p:style>
+        <p:txBody>
+          <a:bodyPr rtlCol="0" anchor="ctr"/>
+          <a:lstStyle/>
+          <a:p>
+            <a:pPr algn="ctr"/>
+          </a:p>
+        </p:txBody>
+      </p:sp>
       <p:pic>
         <p:nvPicPr>
-          <p:cNvPr id="7" name="Picture 6" descr="check_steel.png"/>
+          <p:cNvPr id="8" name="Picture 7" descr="check_white.png"/>
           <p:cNvPicPr>
             <a:picLocks noChangeAspect="1"/>
           </p:cNvPicPr>
@@ -8684,8 +9397,8 @@
         </p:blipFill>
         <p:spPr>
           <a:xfrm>
-            <a:off x="987552" y="2542032"/>
-            <a:ext cx="237744" cy="237744"/>
+            <a:off x="1110447" y="2655783"/>
+            <a:ext cx="266273" cy="266273"/>
           </a:xfrm>
           <a:prstGeom prst="rect">
             <a:avLst/>
@@ -8694,14 +9407,14 @@
       </p:pic>
       <p:sp>
         <p:nvSpPr>
-          <p:cNvPr id="8" name="TextBox 7"/>
+          <p:cNvPr id="9" name="TextBox 8"/>
           <p:cNvSpPr txBox="1"/>
           <p:nvPr/>
         </p:nvSpPr>
         <p:spPr>
           <a:xfrm>
-            <a:off x="1353312" y="2395728"/>
-            <a:ext cx="5029200" cy="530352"/>
+            <a:off x="1627632" y="2395728"/>
+            <a:ext cx="4206240" cy="786384"/>
           </a:xfrm>
           <a:prstGeom prst="rect">
             <a:avLst/>
@@ -8726,7 +9439,7 @@
               </a:spcAft>
             </a:pPr>
             <a:r>
-              <a:rPr sz="1200" b="0">
+              <a:rPr sz="1150" b="0">
                 <a:solidFill>
                   <a:srgbClr val="1A1A1A"/>
                 </a:solidFill>
@@ -8739,18 +9452,18 @@
       </p:sp>
       <p:sp>
         <p:nvSpPr>
-          <p:cNvPr id="9" name="Rounded Rectangle 8"/>
+          <p:cNvPr id="10" name="Rounded Rectangle 9"/>
           <p:cNvSpPr/>
           <p:nvPr/>
         </p:nvSpPr>
         <p:spPr>
           <a:xfrm>
-            <a:off x="841248" y="2999232"/>
-            <a:ext cx="5715000" cy="530352"/>
+            <a:off x="6254496" y="2395728"/>
+            <a:ext cx="5138928" cy="786384"/>
           </a:xfrm>
           <a:prstGeom prst="roundRect">
             <a:avLst>
-              <a:gd name="adj" fmla="val 6000"/>
+              <a:gd name="adj" fmla="val 7000"/>
             </a:avLst>
           </a:prstGeom>
           <a:solidFill>
@@ -8785,9 +9498,55 @@
           </a:p>
         </p:txBody>
       </p:sp>
+      <p:sp>
+        <p:nvSpPr>
+          <p:cNvPr id="11" name="Rounded Rectangle 10"/>
+          <p:cNvSpPr/>
+          <p:nvPr/>
+        </p:nvSpPr>
+        <p:spPr>
+          <a:xfrm>
+            <a:off x="6400800" y="2532888"/>
+            <a:ext cx="512064" cy="512064"/>
+          </a:xfrm>
+          <a:prstGeom prst="roundRect">
+            <a:avLst>
+              <a:gd name="adj" fmla="val 26000"/>
+            </a:avLst>
+          </a:prstGeom>
+          <a:solidFill>
+            <a:srgbClr val="EE0000"/>
+          </a:solidFill>
+          <a:ln>
+            <a:noFill/>
+          </a:ln>
+          <a:effectLst/>
+        </p:spPr>
+        <p:style>
+          <a:lnRef idx="1">
+            <a:schemeClr val="accent1"/>
+          </a:lnRef>
+          <a:fillRef idx="3">
+            <a:schemeClr val="accent1"/>
+          </a:fillRef>
+          <a:effectRef idx="2">
+            <a:schemeClr val="accent1"/>
+          </a:effectRef>
+          <a:fontRef idx="minor">
+            <a:schemeClr val="lt1"/>
+          </a:fontRef>
+        </p:style>
+        <p:txBody>
+          <a:bodyPr rtlCol="0" anchor="ctr"/>
+          <a:lstStyle/>
+          <a:p>
+            <a:pPr algn="ctr"/>
+          </a:p>
+        </p:txBody>
+      </p:sp>
       <p:pic>
         <p:nvPicPr>
-          <p:cNvPr id="10" name="Picture 9" descr="check_steel.png"/>
+          <p:cNvPr id="12" name="Picture 11" descr="check_white.png"/>
           <p:cNvPicPr>
             <a:picLocks noChangeAspect="1"/>
           </p:cNvPicPr>
@@ -8801,8 +9560,8 @@
         </p:blipFill>
         <p:spPr>
           <a:xfrm>
-            <a:off x="987552" y="3145536"/>
-            <a:ext cx="237744" cy="237744"/>
+            <a:off x="6523695" y="2655783"/>
+            <a:ext cx="266273" cy="266273"/>
           </a:xfrm>
           <a:prstGeom prst="rect">
             <a:avLst/>
@@ -8811,14 +9570,14 @@
       </p:pic>
       <p:sp>
         <p:nvSpPr>
-          <p:cNvPr id="11" name="TextBox 10"/>
+          <p:cNvPr id="13" name="TextBox 12"/>
           <p:cNvSpPr txBox="1"/>
           <p:nvPr/>
         </p:nvSpPr>
         <p:spPr>
           <a:xfrm>
-            <a:off x="1353312" y="2999232"/>
-            <a:ext cx="5029200" cy="530352"/>
+            <a:off x="7040880" y="2395728"/>
+            <a:ext cx="4206240" cy="786384"/>
           </a:xfrm>
           <a:prstGeom prst="rect">
             <a:avLst/>
@@ -8843,7 +9602,7 @@
               </a:spcAft>
             </a:pPr>
             <a:r>
-              <a:rPr sz="1200" b="0">
+              <a:rPr sz="1150" b="0">
                 <a:solidFill>
                   <a:srgbClr val="1A1A1A"/>
                 </a:solidFill>
@@ -8856,18 +9615,18 @@
       </p:sp>
       <p:sp>
         <p:nvSpPr>
-          <p:cNvPr id="12" name="Rounded Rectangle 11"/>
+          <p:cNvPr id="14" name="Rounded Rectangle 13"/>
           <p:cNvSpPr/>
           <p:nvPr/>
         </p:nvSpPr>
         <p:spPr>
           <a:xfrm>
-            <a:off x="841248" y="3602736"/>
-            <a:ext cx="5715000" cy="530352"/>
+            <a:off x="841248" y="3328416"/>
+            <a:ext cx="5138928" cy="786384"/>
           </a:xfrm>
           <a:prstGeom prst="roundRect">
             <a:avLst>
-              <a:gd name="adj" fmla="val 6000"/>
+              <a:gd name="adj" fmla="val 7000"/>
             </a:avLst>
           </a:prstGeom>
           <a:solidFill>
@@ -8902,9 +9661,55 @@
           </a:p>
         </p:txBody>
       </p:sp>
+      <p:sp>
+        <p:nvSpPr>
+          <p:cNvPr id="15" name="Rounded Rectangle 14"/>
+          <p:cNvSpPr/>
+          <p:nvPr/>
+        </p:nvSpPr>
+        <p:spPr>
+          <a:xfrm>
+            <a:off x="987552" y="3465576"/>
+            <a:ext cx="512064" cy="512064"/>
+          </a:xfrm>
+          <a:prstGeom prst="roundRect">
+            <a:avLst>
+              <a:gd name="adj" fmla="val 26000"/>
+            </a:avLst>
+          </a:prstGeom>
+          <a:solidFill>
+            <a:srgbClr val="EE0000"/>
+          </a:solidFill>
+          <a:ln>
+            <a:noFill/>
+          </a:ln>
+          <a:effectLst/>
+        </p:spPr>
+        <p:style>
+          <a:lnRef idx="1">
+            <a:schemeClr val="accent1"/>
+          </a:lnRef>
+          <a:fillRef idx="3">
+            <a:schemeClr val="accent1"/>
+          </a:fillRef>
+          <a:effectRef idx="2">
+            <a:schemeClr val="accent1"/>
+          </a:effectRef>
+          <a:fontRef idx="minor">
+            <a:schemeClr val="lt1"/>
+          </a:fontRef>
+        </p:style>
+        <p:txBody>
+          <a:bodyPr rtlCol="0" anchor="ctr"/>
+          <a:lstStyle/>
+          <a:p>
+            <a:pPr algn="ctr"/>
+          </a:p>
+        </p:txBody>
+      </p:sp>
       <p:pic>
         <p:nvPicPr>
-          <p:cNvPr id="13" name="Picture 12" descr="check_steel.png"/>
+          <p:cNvPr id="16" name="Picture 15" descr="check_white.png"/>
           <p:cNvPicPr>
             <a:picLocks noChangeAspect="1"/>
           </p:cNvPicPr>
@@ -8918,8 +9723,8 @@
         </p:blipFill>
         <p:spPr>
           <a:xfrm>
-            <a:off x="987552" y="3749040"/>
-            <a:ext cx="237744" cy="237744"/>
+            <a:off x="1110447" y="3588471"/>
+            <a:ext cx="266273" cy="266273"/>
           </a:xfrm>
           <a:prstGeom prst="rect">
             <a:avLst/>
@@ -8928,14 +9733,14 @@
       </p:pic>
       <p:sp>
         <p:nvSpPr>
-          <p:cNvPr id="14" name="TextBox 13"/>
+          <p:cNvPr id="17" name="TextBox 16"/>
           <p:cNvSpPr txBox="1"/>
           <p:nvPr/>
         </p:nvSpPr>
         <p:spPr>
           <a:xfrm>
-            <a:off x="1353312" y="3602736"/>
-            <a:ext cx="5029200" cy="530352"/>
+            <a:off x="1627632" y="3328416"/>
+            <a:ext cx="4206240" cy="786384"/>
           </a:xfrm>
           <a:prstGeom prst="rect">
             <a:avLst/>
@@ -8960,7 +9765,7 @@
               </a:spcAft>
             </a:pPr>
             <a:r>
-              <a:rPr sz="1200" b="0">
+              <a:rPr sz="1150" b="0">
                 <a:solidFill>
                   <a:srgbClr val="1A1A1A"/>
                 </a:solidFill>
@@ -8973,18 +9778,18 @@
       </p:sp>
       <p:sp>
         <p:nvSpPr>
-          <p:cNvPr id="15" name="Rounded Rectangle 14"/>
+          <p:cNvPr id="18" name="Rounded Rectangle 17"/>
           <p:cNvSpPr/>
           <p:nvPr/>
         </p:nvSpPr>
         <p:spPr>
           <a:xfrm>
-            <a:off x="841248" y="4206240"/>
-            <a:ext cx="5715000" cy="530352"/>
+            <a:off x="6254496" y="3328416"/>
+            <a:ext cx="5138928" cy="786384"/>
           </a:xfrm>
           <a:prstGeom prst="roundRect">
             <a:avLst>
-              <a:gd name="adj" fmla="val 6000"/>
+              <a:gd name="adj" fmla="val 7000"/>
             </a:avLst>
           </a:prstGeom>
           <a:solidFill>
@@ -9019,9 +9824,55 @@
           </a:p>
         </p:txBody>
       </p:sp>
+      <p:sp>
+        <p:nvSpPr>
+          <p:cNvPr id="19" name="Rounded Rectangle 18"/>
+          <p:cNvSpPr/>
+          <p:nvPr/>
+        </p:nvSpPr>
+        <p:spPr>
+          <a:xfrm>
+            <a:off x="6400800" y="3465576"/>
+            <a:ext cx="512064" cy="512064"/>
+          </a:xfrm>
+          <a:prstGeom prst="roundRect">
+            <a:avLst>
+              <a:gd name="adj" fmla="val 26000"/>
+            </a:avLst>
+          </a:prstGeom>
+          <a:solidFill>
+            <a:srgbClr val="EE0000"/>
+          </a:solidFill>
+          <a:ln>
+            <a:noFill/>
+          </a:ln>
+          <a:effectLst/>
+        </p:spPr>
+        <p:style>
+          <a:lnRef idx="1">
+            <a:schemeClr val="accent1"/>
+          </a:lnRef>
+          <a:fillRef idx="3">
+            <a:schemeClr val="accent1"/>
+          </a:fillRef>
+          <a:effectRef idx="2">
+            <a:schemeClr val="accent1"/>
+          </a:effectRef>
+          <a:fontRef idx="minor">
+            <a:schemeClr val="lt1"/>
+          </a:fontRef>
+        </p:style>
+        <p:txBody>
+          <a:bodyPr rtlCol="0" anchor="ctr"/>
+          <a:lstStyle/>
+          <a:p>
+            <a:pPr algn="ctr"/>
+          </a:p>
+        </p:txBody>
+      </p:sp>
       <p:pic>
         <p:nvPicPr>
-          <p:cNvPr id="16" name="Picture 15" descr="check_steel.png"/>
+          <p:cNvPr id="20" name="Picture 19" descr="check_white.png"/>
           <p:cNvPicPr>
             <a:picLocks noChangeAspect="1"/>
           </p:cNvPicPr>
@@ -9035,8 +9886,8 @@
         </p:blipFill>
         <p:spPr>
           <a:xfrm>
-            <a:off x="987552" y="4352544"/>
-            <a:ext cx="237744" cy="237744"/>
+            <a:off x="6523695" y="3588471"/>
+            <a:ext cx="266273" cy="266273"/>
           </a:xfrm>
           <a:prstGeom prst="rect">
             <a:avLst/>
@@ -9045,14 +9896,14 @@
       </p:pic>
       <p:sp>
         <p:nvSpPr>
-          <p:cNvPr id="17" name="TextBox 16"/>
+          <p:cNvPr id="21" name="TextBox 20"/>
           <p:cNvSpPr txBox="1"/>
           <p:nvPr/>
         </p:nvSpPr>
         <p:spPr>
           <a:xfrm>
-            <a:off x="1353312" y="4206240"/>
-            <a:ext cx="5029200" cy="530352"/>
+            <a:off x="7040880" y="3328416"/>
+            <a:ext cx="4206240" cy="786384"/>
           </a:xfrm>
           <a:prstGeom prst="rect">
             <a:avLst/>
@@ -9077,7 +9928,7 @@
               </a:spcAft>
             </a:pPr>
             <a:r>
-              <a:rPr sz="1200" b="0">
+              <a:rPr sz="1150" b="0">
                 <a:solidFill>
                   <a:srgbClr val="1A1A1A"/>
                 </a:solidFill>
@@ -9090,18 +9941,18 @@
       </p:sp>
       <p:sp>
         <p:nvSpPr>
-          <p:cNvPr id="18" name="Rounded Rectangle 17"/>
+          <p:cNvPr id="22" name="Rounded Rectangle 21"/>
           <p:cNvSpPr/>
           <p:nvPr/>
         </p:nvSpPr>
         <p:spPr>
           <a:xfrm>
-            <a:off x="841248" y="4809744"/>
-            <a:ext cx="5715000" cy="530352"/>
+            <a:off x="841248" y="4261104"/>
+            <a:ext cx="5138928" cy="786384"/>
           </a:xfrm>
           <a:prstGeom prst="roundRect">
             <a:avLst>
-              <a:gd name="adj" fmla="val 6000"/>
+              <a:gd name="adj" fmla="val 7000"/>
             </a:avLst>
           </a:prstGeom>
           <a:solidFill>
@@ -9136,9 +9987,55 @@
           </a:p>
         </p:txBody>
       </p:sp>
+      <p:sp>
+        <p:nvSpPr>
+          <p:cNvPr id="23" name="Rounded Rectangle 22"/>
+          <p:cNvSpPr/>
+          <p:nvPr/>
+        </p:nvSpPr>
+        <p:spPr>
+          <a:xfrm>
+            <a:off x="987552" y="4398264"/>
+            <a:ext cx="512064" cy="512064"/>
+          </a:xfrm>
+          <a:prstGeom prst="roundRect">
+            <a:avLst>
+              <a:gd name="adj" fmla="val 26000"/>
+            </a:avLst>
+          </a:prstGeom>
+          <a:solidFill>
+            <a:srgbClr val="EE0000"/>
+          </a:solidFill>
+          <a:ln>
+            <a:noFill/>
+          </a:ln>
+          <a:effectLst/>
+        </p:spPr>
+        <p:style>
+          <a:lnRef idx="1">
+            <a:schemeClr val="accent1"/>
+          </a:lnRef>
+          <a:fillRef idx="3">
+            <a:schemeClr val="accent1"/>
+          </a:fillRef>
+          <a:effectRef idx="2">
+            <a:schemeClr val="accent1"/>
+          </a:effectRef>
+          <a:fontRef idx="minor">
+            <a:schemeClr val="lt1"/>
+          </a:fontRef>
+        </p:style>
+        <p:txBody>
+          <a:bodyPr rtlCol="0" anchor="ctr"/>
+          <a:lstStyle/>
+          <a:p>
+            <a:pPr algn="ctr"/>
+          </a:p>
+        </p:txBody>
+      </p:sp>
       <p:pic>
         <p:nvPicPr>
-          <p:cNvPr id="19" name="Picture 18" descr="check_steel.png"/>
+          <p:cNvPr id="24" name="Picture 23" descr="check_white.png"/>
           <p:cNvPicPr>
             <a:picLocks noChangeAspect="1"/>
           </p:cNvPicPr>
@@ -9152,8 +10049,8 @@
         </p:blipFill>
         <p:spPr>
           <a:xfrm>
-            <a:off x="987552" y="4956048"/>
-            <a:ext cx="237744" cy="237744"/>
+            <a:off x="1110447" y="4521159"/>
+            <a:ext cx="266273" cy="266273"/>
           </a:xfrm>
           <a:prstGeom prst="rect">
             <a:avLst/>
@@ -9162,14 +10059,14 @@
       </p:pic>
       <p:sp>
         <p:nvSpPr>
-          <p:cNvPr id="20" name="TextBox 19"/>
+          <p:cNvPr id="25" name="TextBox 24"/>
           <p:cNvSpPr txBox="1"/>
           <p:nvPr/>
         </p:nvSpPr>
         <p:spPr>
           <a:xfrm>
-            <a:off x="1353312" y="4809744"/>
-            <a:ext cx="5029200" cy="530352"/>
+            <a:off x="1627632" y="4261104"/>
+            <a:ext cx="4206240" cy="786384"/>
           </a:xfrm>
           <a:prstGeom prst="rect">
             <a:avLst/>
@@ -9194,221 +10091,13 @@
               </a:spcAft>
             </a:pPr>
             <a:r>
-              <a:rPr sz="1200" b="0">
+              <a:rPr sz="1150" b="0">
                 <a:solidFill>
                   <a:srgbClr val="1A1A1A"/>
                 </a:solidFill>
                 <a:latin typeface="Red Hat Text"/>
               </a:rPr>
               <a:t>Watch health and metrics answer, unconfigured</a:t>
-            </a:r>
-          </a:p>
-        </p:txBody>
-      </p:sp>
-      <p:sp>
-        <p:nvSpPr>
-          <p:cNvPr id="21" name="Rounded Rectangle 20"/>
-          <p:cNvSpPr/>
-          <p:nvPr/>
-        </p:nvSpPr>
-        <p:spPr>
-          <a:xfrm>
-            <a:off x="6812280" y="2395728"/>
-            <a:ext cx="4538167" cy="2944368"/>
-          </a:xfrm>
-          <a:prstGeom prst="roundRect">
-            <a:avLst>
-              <a:gd name="adj" fmla="val 4000"/>
-            </a:avLst>
-          </a:prstGeom>
-          <a:solidFill>
-            <a:srgbClr val="FFFFFF"/>
-          </a:solidFill>
-          <a:ln w="15240">
-            <a:solidFill>
-              <a:srgbClr val="DDE1E6"/>
-            </a:solidFill>
-          </a:ln>
-          <a:effectLst/>
-        </p:spPr>
-        <p:style>
-          <a:lnRef idx="1">
-            <a:schemeClr val="accent1"/>
-          </a:lnRef>
-          <a:fillRef idx="3">
-            <a:schemeClr val="accent1"/>
-          </a:fillRef>
-          <a:effectRef idx="2">
-            <a:schemeClr val="accent1"/>
-          </a:effectRef>
-          <a:fontRef idx="minor">
-            <a:schemeClr val="lt1"/>
-          </a:fontRef>
-        </p:style>
-        <p:txBody>
-          <a:bodyPr rtlCol="0" anchor="ctr"/>
-          <a:lstStyle/>
-          <a:p>
-            <a:pPr algn="ctr"/>
-          </a:p>
-        </p:txBody>
-      </p:sp>
-      <p:sp>
-        <p:nvSpPr>
-          <p:cNvPr id="22" name="Rounded Rectangle 21"/>
-          <p:cNvSpPr/>
-          <p:nvPr/>
-        </p:nvSpPr>
-        <p:spPr>
-          <a:xfrm>
-            <a:off x="7013448" y="2596896"/>
-            <a:ext cx="1298448" cy="310896"/>
-          </a:xfrm>
-          <a:prstGeom prst="roundRect">
-            <a:avLst>
-              <a:gd name="adj" fmla="val 50000"/>
-            </a:avLst>
-          </a:prstGeom>
-          <a:solidFill>
-            <a:srgbClr val="FCECEC"/>
-          </a:solidFill>
-          <a:ln>
-            <a:noFill/>
-          </a:ln>
-          <a:effectLst/>
-        </p:spPr>
-        <p:style>
-          <a:lnRef idx="1">
-            <a:schemeClr val="accent1"/>
-          </a:lnRef>
-          <a:fillRef idx="3">
-            <a:schemeClr val="accent1"/>
-          </a:fillRef>
-          <a:effectRef idx="2">
-            <a:schemeClr val="accent1"/>
-          </a:effectRef>
-          <a:fontRef idx="minor">
-            <a:schemeClr val="lt1"/>
-          </a:fontRef>
-        </p:style>
-        <p:txBody>
-          <a:bodyPr rtlCol="0" anchor="ctr"/>
-          <a:lstStyle/>
-          <a:p>
-            <a:pPr algn="ctr"/>
-          </a:p>
-        </p:txBody>
-      </p:sp>
-      <p:sp>
-        <p:nvSpPr>
-          <p:cNvPr id="23" name="TextBox 22"/>
-          <p:cNvSpPr txBox="1"/>
-          <p:nvPr/>
-        </p:nvSpPr>
-        <p:spPr>
-          <a:xfrm>
-            <a:off x="7013448" y="2596896"/>
-            <a:ext cx="1298448" cy="310896"/>
-          </a:xfrm>
-          <a:prstGeom prst="rect">
-            <a:avLst/>
-          </a:prstGeom>
-          <a:noFill/>
-        </p:spPr>
-        <p:txBody>
-          <a:bodyPr wrap="none" anchor="ctr" lIns="0" rIns="0" tIns="0" bIns="0">
-            <a:spAutoFit/>
-          </a:bodyPr>
-          <a:lstStyle/>
-          <a:p>
-            <a:pPr algn="ctr">
-              <a:lnSpc>
-                <a:spcPct val="106000"/>
-              </a:lnSpc>
-              <a:spcBef>
-                <a:spcPts val="0"/>
-              </a:spcBef>
-              <a:spcAft>
-                <a:spcPts val="0"/>
-              </a:spcAft>
-            </a:pPr>
-            <a:r>
-              <a:rPr sz="850" b="1">
-                <a:solidFill>
-                  <a:srgbClr val="B80000"/>
-                </a:solidFill>
-                <a:latin typeface="Red Hat Display"/>
-              </a:rPr>
-              <a:t>MEDIA PASS</a:t>
-            </a:r>
-          </a:p>
-        </p:txBody>
-      </p:sp>
-      <p:pic>
-        <p:nvPicPr>
-          <p:cNvPr id="24" name="Picture 23" descr="eye_slate.png"/>
-          <p:cNvPicPr>
-            <a:picLocks noChangeAspect="1"/>
-          </p:cNvPicPr>
-          <p:nvPr/>
-        </p:nvPicPr>
-        <p:blipFill>
-          <a:blip r:embed="rId4"/>
-          <a:stretch>
-            <a:fillRect/>
-          </a:stretch>
-        </p:blipFill>
-        <p:spPr>
-          <a:xfrm>
-            <a:off x="8843619" y="3108960"/>
-            <a:ext cx="475488" cy="475488"/>
-          </a:xfrm>
-          <a:prstGeom prst="rect">
-            <a:avLst/>
-          </a:prstGeom>
-        </p:spPr>
-      </p:pic>
-      <p:sp>
-        <p:nvSpPr>
-          <p:cNvPr id="25" name="TextBox 24"/>
-          <p:cNvSpPr txBox="1"/>
-          <p:nvPr/>
-        </p:nvSpPr>
-        <p:spPr>
-          <a:xfrm>
-            <a:off x="7050024" y="3721608"/>
-            <a:ext cx="4062679" cy="1481328"/>
-          </a:xfrm>
-          <a:prstGeom prst="rect">
-            <a:avLst/>
-          </a:prstGeom>
-          <a:noFill/>
-        </p:spPr>
-        <p:txBody>
-          <a:bodyPr wrap="square" anchor="t" lIns="0" rIns="0" tIns="0" bIns="0">
-            <a:spAutoFit/>
-          </a:bodyPr>
-          <a:lstStyle/>
-          <a:p>
-            <a:pPr algn="l">
-              <a:lnSpc>
-                <a:spcPct val="120000"/>
-              </a:lnSpc>
-              <a:spcBef>
-                <a:spcPts val="0"/>
-              </a:spcBef>
-              <a:spcAft>
-                <a:spcPts val="0"/>
-              </a:spcAft>
-            </a:pPr>
-            <a:r>
-              <a:rPr sz="950" b="0">
-                <a:solidFill>
-                  <a:srgbClr val="8A9099"/>
-                </a:solidFill>
-                <a:latin typeface="Red Hat Text"/>
-              </a:rPr>
-              <a:t>A four-step horizontal strip: Catalog → Scaffold → Inspect → Run, each with a small icon; a "break: 409" callout under Scaffold.</a:t>
             </a:r>
           </a:p>
         </p:txBody>
@@ -9716,11 +10405,11 @@
         <p:spPr>
           <a:xfrm>
             <a:off x="841248" y="2395728"/>
-            <a:ext cx="5715000" cy="530352"/>
+            <a:ext cx="5138928" cy="786384"/>
           </a:xfrm>
           <a:prstGeom prst="roundRect">
             <a:avLst>
-              <a:gd name="adj" fmla="val 6000"/>
+              <a:gd name="adj" fmla="val 7000"/>
             </a:avLst>
           </a:prstGeom>
           <a:solidFill>
@@ -9755,9 +10444,55 @@
           </a:p>
         </p:txBody>
       </p:sp>
+      <p:sp>
+        <p:nvSpPr>
+          <p:cNvPr id="7" name="Rounded Rectangle 6"/>
+          <p:cNvSpPr/>
+          <p:nvPr/>
+        </p:nvSpPr>
+        <p:spPr>
+          <a:xfrm>
+            <a:off x="987552" y="2532888"/>
+            <a:ext cx="512064" cy="512064"/>
+          </a:xfrm>
+          <a:prstGeom prst="roundRect">
+            <a:avLst>
+              <a:gd name="adj" fmla="val 26000"/>
+            </a:avLst>
+          </a:prstGeom>
+          <a:solidFill>
+            <a:srgbClr val="EE0000"/>
+          </a:solidFill>
+          <a:ln>
+            <a:noFill/>
+          </a:ln>
+          <a:effectLst/>
+        </p:spPr>
+        <p:style>
+          <a:lnRef idx="1">
+            <a:schemeClr val="accent1"/>
+          </a:lnRef>
+          <a:fillRef idx="3">
+            <a:schemeClr val="accent1"/>
+          </a:fillRef>
+          <a:effectRef idx="2">
+            <a:schemeClr val="accent1"/>
+          </a:effectRef>
+          <a:fontRef idx="minor">
+            <a:schemeClr val="lt1"/>
+          </a:fontRef>
+        </p:style>
+        <p:txBody>
+          <a:bodyPr rtlCol="0" anchor="ctr"/>
+          <a:lstStyle/>
+          <a:p>
+            <a:pPr algn="ctr"/>
+          </a:p>
+        </p:txBody>
+      </p:sp>
       <p:pic>
         <p:nvPicPr>
-          <p:cNvPr id="7" name="Picture 6" descr="check_steel.png"/>
+          <p:cNvPr id="8" name="Picture 7" descr="check_white.png"/>
           <p:cNvPicPr>
             <a:picLocks noChangeAspect="1"/>
           </p:cNvPicPr>
@@ -9771,8 +10506,8 @@
         </p:blipFill>
         <p:spPr>
           <a:xfrm>
-            <a:off x="987552" y="2542032"/>
-            <a:ext cx="237744" cy="237744"/>
+            <a:off x="1110447" y="2655783"/>
+            <a:ext cx="266273" cy="266273"/>
           </a:xfrm>
           <a:prstGeom prst="rect">
             <a:avLst/>
@@ -9781,14 +10516,14 @@
       </p:pic>
       <p:sp>
         <p:nvSpPr>
-          <p:cNvPr id="8" name="TextBox 7"/>
+          <p:cNvPr id="9" name="TextBox 8"/>
           <p:cNvSpPr txBox="1"/>
           <p:nvPr/>
         </p:nvSpPr>
         <p:spPr>
           <a:xfrm>
-            <a:off x="1353312" y="2395728"/>
-            <a:ext cx="5029200" cy="530352"/>
+            <a:off x="1627632" y="2395728"/>
+            <a:ext cx="4206240" cy="786384"/>
           </a:xfrm>
           <a:prstGeom prst="rect">
             <a:avLst/>
@@ -9813,7 +10548,7 @@
               </a:spcAft>
             </a:pPr>
             <a:r>
-              <a:rPr sz="1200" b="0">
+              <a:rPr sz="1150" b="0">
                 <a:solidFill>
                   <a:srgbClr val="1A1A1A"/>
                 </a:solidFill>
@@ -9826,18 +10561,18 @@
       </p:sp>
       <p:sp>
         <p:nvSpPr>
-          <p:cNvPr id="9" name="Rounded Rectangle 8"/>
+          <p:cNvPr id="10" name="Rounded Rectangle 9"/>
           <p:cNvSpPr/>
           <p:nvPr/>
         </p:nvSpPr>
         <p:spPr>
           <a:xfrm>
-            <a:off x="841248" y="2999232"/>
-            <a:ext cx="5715000" cy="530352"/>
+            <a:off x="6254496" y="2395728"/>
+            <a:ext cx="5138928" cy="786384"/>
           </a:xfrm>
           <a:prstGeom prst="roundRect">
             <a:avLst>
-              <a:gd name="adj" fmla="val 6000"/>
+              <a:gd name="adj" fmla="val 7000"/>
             </a:avLst>
           </a:prstGeom>
           <a:solidFill>
@@ -9872,9 +10607,55 @@
           </a:p>
         </p:txBody>
       </p:sp>
+      <p:sp>
+        <p:nvSpPr>
+          <p:cNvPr id="11" name="Rounded Rectangle 10"/>
+          <p:cNvSpPr/>
+          <p:nvPr/>
+        </p:nvSpPr>
+        <p:spPr>
+          <a:xfrm>
+            <a:off x="6400800" y="2532888"/>
+            <a:ext cx="512064" cy="512064"/>
+          </a:xfrm>
+          <a:prstGeom prst="roundRect">
+            <a:avLst>
+              <a:gd name="adj" fmla="val 26000"/>
+            </a:avLst>
+          </a:prstGeom>
+          <a:solidFill>
+            <a:srgbClr val="EE0000"/>
+          </a:solidFill>
+          <a:ln>
+            <a:noFill/>
+          </a:ln>
+          <a:effectLst/>
+        </p:spPr>
+        <p:style>
+          <a:lnRef idx="1">
+            <a:schemeClr val="accent1"/>
+          </a:lnRef>
+          <a:fillRef idx="3">
+            <a:schemeClr val="accent1"/>
+          </a:fillRef>
+          <a:effectRef idx="2">
+            <a:schemeClr val="accent1"/>
+          </a:effectRef>
+          <a:fontRef idx="minor">
+            <a:schemeClr val="lt1"/>
+          </a:fontRef>
+        </p:style>
+        <p:txBody>
+          <a:bodyPr rtlCol="0" anchor="ctr"/>
+          <a:lstStyle/>
+          <a:p>
+            <a:pPr algn="ctr"/>
+          </a:p>
+        </p:txBody>
+      </p:sp>
       <p:pic>
         <p:nvPicPr>
-          <p:cNvPr id="10" name="Picture 9" descr="check_steel.png"/>
+          <p:cNvPr id="12" name="Picture 11" descr="check_white.png"/>
           <p:cNvPicPr>
             <a:picLocks noChangeAspect="1"/>
           </p:cNvPicPr>
@@ -9888,8 +10669,8 @@
         </p:blipFill>
         <p:spPr>
           <a:xfrm>
-            <a:off x="987552" y="3145536"/>
-            <a:ext cx="237744" cy="237744"/>
+            <a:off x="6523695" y="2655783"/>
+            <a:ext cx="266273" cy="266273"/>
           </a:xfrm>
           <a:prstGeom prst="rect">
             <a:avLst/>
@@ -9898,14 +10679,14 @@
       </p:pic>
       <p:sp>
         <p:nvSpPr>
-          <p:cNvPr id="11" name="TextBox 10"/>
+          <p:cNvPr id="13" name="TextBox 12"/>
           <p:cNvSpPr txBox="1"/>
           <p:nvPr/>
         </p:nvSpPr>
         <p:spPr>
           <a:xfrm>
-            <a:off x="1353312" y="2999232"/>
-            <a:ext cx="5029200" cy="530352"/>
+            <a:off x="7040880" y="2395728"/>
+            <a:ext cx="4206240" cy="786384"/>
           </a:xfrm>
           <a:prstGeom prst="rect">
             <a:avLst/>
@@ -9930,7 +10711,7 @@
               </a:spcAft>
             </a:pPr>
             <a:r>
-              <a:rPr sz="1200" b="0">
+              <a:rPr sz="1150" b="0">
                 <a:solidFill>
                   <a:srgbClr val="1A1A1A"/>
                 </a:solidFill>
@@ -9943,18 +10724,18 @@
       </p:sp>
       <p:sp>
         <p:nvSpPr>
-          <p:cNvPr id="12" name="Rounded Rectangle 11"/>
+          <p:cNvPr id="14" name="Rounded Rectangle 13"/>
           <p:cNvSpPr/>
           <p:nvPr/>
         </p:nvSpPr>
         <p:spPr>
           <a:xfrm>
-            <a:off x="841248" y="3602736"/>
-            <a:ext cx="5715000" cy="530352"/>
+            <a:off x="841248" y="3328416"/>
+            <a:ext cx="5138928" cy="786384"/>
           </a:xfrm>
           <a:prstGeom prst="roundRect">
             <a:avLst>
-              <a:gd name="adj" fmla="val 6000"/>
+              <a:gd name="adj" fmla="val 7000"/>
             </a:avLst>
           </a:prstGeom>
           <a:solidFill>
@@ -9989,9 +10770,55 @@
           </a:p>
         </p:txBody>
       </p:sp>
+      <p:sp>
+        <p:nvSpPr>
+          <p:cNvPr id="15" name="Rounded Rectangle 14"/>
+          <p:cNvSpPr/>
+          <p:nvPr/>
+        </p:nvSpPr>
+        <p:spPr>
+          <a:xfrm>
+            <a:off x="987552" y="3465576"/>
+            <a:ext cx="512064" cy="512064"/>
+          </a:xfrm>
+          <a:prstGeom prst="roundRect">
+            <a:avLst>
+              <a:gd name="adj" fmla="val 26000"/>
+            </a:avLst>
+          </a:prstGeom>
+          <a:solidFill>
+            <a:srgbClr val="EE0000"/>
+          </a:solidFill>
+          <a:ln>
+            <a:noFill/>
+          </a:ln>
+          <a:effectLst/>
+        </p:spPr>
+        <p:style>
+          <a:lnRef idx="1">
+            <a:schemeClr val="accent1"/>
+          </a:lnRef>
+          <a:fillRef idx="3">
+            <a:schemeClr val="accent1"/>
+          </a:fillRef>
+          <a:effectRef idx="2">
+            <a:schemeClr val="accent1"/>
+          </a:effectRef>
+          <a:fontRef idx="minor">
+            <a:schemeClr val="lt1"/>
+          </a:fontRef>
+        </p:style>
+        <p:txBody>
+          <a:bodyPr rtlCol="0" anchor="ctr"/>
+          <a:lstStyle/>
+          <a:p>
+            <a:pPr algn="ctr"/>
+          </a:p>
+        </p:txBody>
+      </p:sp>
       <p:pic>
         <p:nvPicPr>
-          <p:cNvPr id="13" name="Picture 12" descr="check_steel.png"/>
+          <p:cNvPr id="16" name="Picture 15" descr="check_white.png"/>
           <p:cNvPicPr>
             <a:picLocks noChangeAspect="1"/>
           </p:cNvPicPr>
@@ -10005,8 +10832,8 @@
         </p:blipFill>
         <p:spPr>
           <a:xfrm>
-            <a:off x="987552" y="3749040"/>
-            <a:ext cx="237744" cy="237744"/>
+            <a:off x="1110447" y="3588471"/>
+            <a:ext cx="266273" cy="266273"/>
           </a:xfrm>
           <a:prstGeom prst="rect">
             <a:avLst/>
@@ -10015,14 +10842,14 @@
       </p:pic>
       <p:sp>
         <p:nvSpPr>
-          <p:cNvPr id="14" name="TextBox 13"/>
+          <p:cNvPr id="17" name="TextBox 16"/>
           <p:cNvSpPr txBox="1"/>
           <p:nvPr/>
         </p:nvSpPr>
         <p:spPr>
           <a:xfrm>
-            <a:off x="1353312" y="3602736"/>
-            <a:ext cx="5029200" cy="530352"/>
+            <a:off x="1627632" y="3328416"/>
+            <a:ext cx="4206240" cy="786384"/>
           </a:xfrm>
           <a:prstGeom prst="rect">
             <a:avLst/>
@@ -10047,7 +10874,7 @@
               </a:spcAft>
             </a:pPr>
             <a:r>
-              <a:rPr sz="1200" b="0">
+              <a:rPr sz="1150" b="0">
                 <a:solidFill>
                   <a:srgbClr val="1A1A1A"/>
                 </a:solidFill>
@@ -10060,18 +10887,18 @@
       </p:sp>
       <p:sp>
         <p:nvSpPr>
-          <p:cNvPr id="15" name="Rounded Rectangle 14"/>
+          <p:cNvPr id="18" name="Rounded Rectangle 17"/>
           <p:cNvSpPr/>
           <p:nvPr/>
         </p:nvSpPr>
         <p:spPr>
           <a:xfrm>
-            <a:off x="841248" y="4206240"/>
-            <a:ext cx="5715000" cy="530352"/>
+            <a:off x="6254496" y="3328416"/>
+            <a:ext cx="5138928" cy="786384"/>
           </a:xfrm>
           <a:prstGeom prst="roundRect">
             <a:avLst>
-              <a:gd name="adj" fmla="val 6000"/>
+              <a:gd name="adj" fmla="val 7000"/>
             </a:avLst>
           </a:prstGeom>
           <a:solidFill>
@@ -10106,9 +10933,55 @@
           </a:p>
         </p:txBody>
       </p:sp>
+      <p:sp>
+        <p:nvSpPr>
+          <p:cNvPr id="19" name="Rounded Rectangle 18"/>
+          <p:cNvSpPr/>
+          <p:nvPr/>
+        </p:nvSpPr>
+        <p:spPr>
+          <a:xfrm>
+            <a:off x="6400800" y="3465576"/>
+            <a:ext cx="512064" cy="512064"/>
+          </a:xfrm>
+          <a:prstGeom prst="roundRect">
+            <a:avLst>
+              <a:gd name="adj" fmla="val 26000"/>
+            </a:avLst>
+          </a:prstGeom>
+          <a:solidFill>
+            <a:srgbClr val="EE0000"/>
+          </a:solidFill>
+          <a:ln>
+            <a:noFill/>
+          </a:ln>
+          <a:effectLst/>
+        </p:spPr>
+        <p:style>
+          <a:lnRef idx="1">
+            <a:schemeClr val="accent1"/>
+          </a:lnRef>
+          <a:fillRef idx="3">
+            <a:schemeClr val="accent1"/>
+          </a:fillRef>
+          <a:effectRef idx="2">
+            <a:schemeClr val="accent1"/>
+          </a:effectRef>
+          <a:fontRef idx="minor">
+            <a:schemeClr val="lt1"/>
+          </a:fontRef>
+        </p:style>
+        <p:txBody>
+          <a:bodyPr rtlCol="0" anchor="ctr"/>
+          <a:lstStyle/>
+          <a:p>
+            <a:pPr algn="ctr"/>
+          </a:p>
+        </p:txBody>
+      </p:sp>
       <p:pic>
         <p:nvPicPr>
-          <p:cNvPr id="16" name="Picture 15" descr="check_steel.png"/>
+          <p:cNvPr id="20" name="Picture 19" descr="check_white.png"/>
           <p:cNvPicPr>
             <a:picLocks noChangeAspect="1"/>
           </p:cNvPicPr>
@@ -10122,8 +10995,8 @@
         </p:blipFill>
         <p:spPr>
           <a:xfrm>
-            <a:off x="987552" y="4352544"/>
-            <a:ext cx="237744" cy="237744"/>
+            <a:off x="6523695" y="3588471"/>
+            <a:ext cx="266273" cy="266273"/>
           </a:xfrm>
           <a:prstGeom prst="rect">
             <a:avLst/>
@@ -10132,14 +11005,14 @@
       </p:pic>
       <p:sp>
         <p:nvSpPr>
-          <p:cNvPr id="17" name="TextBox 16"/>
+          <p:cNvPr id="21" name="TextBox 20"/>
           <p:cNvSpPr txBox="1"/>
           <p:nvPr/>
         </p:nvSpPr>
         <p:spPr>
           <a:xfrm>
-            <a:off x="1353312" y="4206240"/>
-            <a:ext cx="5029200" cy="530352"/>
+            <a:off x="7040880" y="3328416"/>
+            <a:ext cx="4206240" cy="786384"/>
           </a:xfrm>
           <a:prstGeom prst="rect">
             <a:avLst/>
@@ -10164,7 +11037,7 @@
               </a:spcAft>
             </a:pPr>
             <a:r>
-              <a:rPr sz="1200" b="0">
+              <a:rPr sz="1150" b="0">
                 <a:solidFill>
                   <a:srgbClr val="1A1A1A"/>
                 </a:solidFill>
@@ -10177,18 +11050,18 @@
       </p:sp>
       <p:sp>
         <p:nvSpPr>
-          <p:cNvPr id="18" name="Rounded Rectangle 17"/>
+          <p:cNvPr id="22" name="Rounded Rectangle 21"/>
           <p:cNvSpPr/>
           <p:nvPr/>
         </p:nvSpPr>
         <p:spPr>
           <a:xfrm>
-            <a:off x="841248" y="4809744"/>
-            <a:ext cx="5715000" cy="530352"/>
+            <a:off x="841248" y="4261104"/>
+            <a:ext cx="5138928" cy="786384"/>
           </a:xfrm>
           <a:prstGeom prst="roundRect">
             <a:avLst>
-              <a:gd name="adj" fmla="val 6000"/>
+              <a:gd name="adj" fmla="val 7000"/>
             </a:avLst>
           </a:prstGeom>
           <a:solidFill>
@@ -10223,9 +11096,55 @@
           </a:p>
         </p:txBody>
       </p:sp>
+      <p:sp>
+        <p:nvSpPr>
+          <p:cNvPr id="23" name="Rounded Rectangle 22"/>
+          <p:cNvSpPr/>
+          <p:nvPr/>
+        </p:nvSpPr>
+        <p:spPr>
+          <a:xfrm>
+            <a:off x="987552" y="4398264"/>
+            <a:ext cx="512064" cy="512064"/>
+          </a:xfrm>
+          <a:prstGeom prst="roundRect">
+            <a:avLst>
+              <a:gd name="adj" fmla="val 26000"/>
+            </a:avLst>
+          </a:prstGeom>
+          <a:solidFill>
+            <a:srgbClr val="EE0000"/>
+          </a:solidFill>
+          <a:ln>
+            <a:noFill/>
+          </a:ln>
+          <a:effectLst/>
+        </p:spPr>
+        <p:style>
+          <a:lnRef idx="1">
+            <a:schemeClr val="accent1"/>
+          </a:lnRef>
+          <a:fillRef idx="3">
+            <a:schemeClr val="accent1"/>
+          </a:fillRef>
+          <a:effectRef idx="2">
+            <a:schemeClr val="accent1"/>
+          </a:effectRef>
+          <a:fontRef idx="minor">
+            <a:schemeClr val="lt1"/>
+          </a:fontRef>
+        </p:style>
+        <p:txBody>
+          <a:bodyPr rtlCol="0" anchor="ctr"/>
+          <a:lstStyle/>
+          <a:p>
+            <a:pPr algn="ctr"/>
+          </a:p>
+        </p:txBody>
+      </p:sp>
       <p:pic>
         <p:nvPicPr>
-          <p:cNvPr id="19" name="Picture 18" descr="check_steel.png"/>
+          <p:cNvPr id="24" name="Picture 23" descr="check_white.png"/>
           <p:cNvPicPr>
             <a:picLocks noChangeAspect="1"/>
           </p:cNvPicPr>
@@ -10239,8 +11158,8 @@
         </p:blipFill>
         <p:spPr>
           <a:xfrm>
-            <a:off x="987552" y="4956048"/>
-            <a:ext cx="237744" cy="237744"/>
+            <a:off x="1110447" y="4521159"/>
+            <a:ext cx="266273" cy="266273"/>
           </a:xfrm>
           <a:prstGeom prst="rect">
             <a:avLst/>
@@ -10249,14 +11168,14 @@
       </p:pic>
       <p:sp>
         <p:nvSpPr>
-          <p:cNvPr id="20" name="TextBox 19"/>
+          <p:cNvPr id="25" name="TextBox 24"/>
           <p:cNvSpPr txBox="1"/>
           <p:nvPr/>
         </p:nvSpPr>
         <p:spPr>
           <a:xfrm>
-            <a:off x="1353312" y="4809744"/>
-            <a:ext cx="5029200" cy="530352"/>
+            <a:off x="1627632" y="4261104"/>
+            <a:ext cx="4206240" cy="786384"/>
           </a:xfrm>
           <a:prstGeom prst="rect">
             <a:avLst/>
@@ -10281,7 +11200,7 @@
               </a:spcAft>
             </a:pPr>
             <a:r>
-              <a:rPr sz="1200" b="0">
+              <a:rPr sz="1150" b="0">
                 <a:solidFill>
                   <a:srgbClr val="1A1A1A"/>
                 </a:solidFill>
@@ -10292,16 +11211,310 @@
           </a:p>
         </p:txBody>
       </p:sp>
-      <p:sp>
-        <p:nvSpPr>
-          <p:cNvPr id="21" name="Rounded Rectangle 20"/>
+      <p:cxnSp>
+        <p:nvCxnSpPr>
+          <p:cNvPr id="26" name="Connector 25"/>
+          <p:cNvCxnSpPr/>
+          <p:nvPr/>
+        </p:nvCxnSpPr>
+        <p:spPr>
+          <a:xfrm>
+            <a:off x="841248" y="6437376"/>
+            <a:ext cx="10509199" cy="0"/>
+          </a:xfrm>
+          <a:prstGeom prst="bentConnector3">
+            <a:avLst/>
+          </a:prstGeom>
+          <a:ln w="12700">
+            <a:solidFill>
+              <a:srgbClr val="DDE1E6"/>
+            </a:solidFill>
+          </a:ln>
+          <a:effectLst/>
+        </p:spPr>
+        <p:style>
+          <a:lnRef idx="2">
+            <a:schemeClr val="accent1"/>
+          </a:lnRef>
+          <a:fillRef idx="0">
+            <a:schemeClr val="accent1"/>
+          </a:fillRef>
+          <a:effectRef idx="1">
+            <a:schemeClr val="accent1"/>
+          </a:effectRef>
+          <a:fontRef idx="minor">
+            <a:schemeClr val="tx1"/>
+          </a:fontRef>
+        </p:style>
+      </p:cxnSp>
+      <p:sp>
+        <p:nvSpPr>
+          <p:cNvPr id="27" name="TextBox 26"/>
+          <p:cNvSpPr txBox="1"/>
+          <p:nvPr/>
+        </p:nvSpPr>
+        <p:spPr>
+          <a:xfrm>
+            <a:off x="841248" y="6473952"/>
+            <a:ext cx="7315200" cy="274320"/>
+          </a:xfrm>
+          <a:prstGeom prst="rect">
+            <a:avLst/>
+          </a:prstGeom>
+          <a:noFill/>
+        </p:spPr>
+        <p:txBody>
+          <a:bodyPr wrap="square" anchor="t" lIns="0" rIns="0" tIns="0" bIns="0">
+            <a:spAutoFit/>
+          </a:bodyPr>
+          <a:lstStyle/>
+          <a:p>
+            <a:pPr algn="l">
+              <a:lnSpc>
+                <a:spcPct val="106000"/>
+              </a:lnSpc>
+              <a:spcBef>
+                <a:spcPts val="0"/>
+              </a:spcBef>
+              <a:spcAft>
+                <a:spcPts val="0"/>
+              </a:spcAft>
+            </a:pPr>
+            <a:r>
+              <a:rPr sz="950" b="0">
+                <a:solidFill>
+                  <a:srgbClr val="8A9099"/>
+                </a:solidFill>
+                <a:latin typeface="Red Hat Text"/>
+              </a:rPr>
+              <a:t>CONFIDENTIAL</a:t>
+            </a:r>
+          </a:p>
+        </p:txBody>
+      </p:sp>
+      <p:sp>
+        <p:nvSpPr>
+          <p:cNvPr id="28" name="TextBox 27"/>
+          <p:cNvSpPr txBox="1"/>
+          <p:nvPr/>
+        </p:nvSpPr>
+        <p:spPr>
+          <a:xfrm>
+            <a:off x="10801807" y="6473952"/>
+            <a:ext cx="548640" cy="274320"/>
+          </a:xfrm>
+          <a:prstGeom prst="rect">
+            <a:avLst/>
+          </a:prstGeom>
+          <a:noFill/>
+        </p:spPr>
+        <p:txBody>
+          <a:bodyPr wrap="square" anchor="t" lIns="0" rIns="0" tIns="0" bIns="0">
+            <a:spAutoFit/>
+          </a:bodyPr>
+          <a:lstStyle/>
+          <a:p>
+            <a:pPr algn="r">
+              <a:lnSpc>
+                <a:spcPct val="106000"/>
+              </a:lnSpc>
+              <a:spcBef>
+                <a:spcPts val="0"/>
+              </a:spcBef>
+              <a:spcAft>
+                <a:spcPts val="0"/>
+              </a:spcAft>
+            </a:pPr>
+            <a:r>
+              <a:rPr sz="950" b="0">
+                <a:solidFill>
+                  <a:srgbClr val="8A9099"/>
+                </a:solidFill>
+                <a:latin typeface="Red Hat Text"/>
+              </a:rPr>
+              <a:t>6</a:t>
+            </a:r>
+          </a:p>
+        </p:txBody>
+      </p:sp>
+    </p:spTree>
+  </p:cSld>
+  <p:clrMapOvr>
+    <a:masterClrMapping/>
+  </p:clrMapOvr>
+</p:sld>
+</file>
+
+<file path=ppt/slides/slide8.xml><?xml version="1.0" encoding="utf-8"?>
+<p:sld xmlns:a="http://schemas.openxmlformats.org/drawingml/2006/main" xmlns:p="http://schemas.openxmlformats.org/presentationml/2006/main" xmlns:r="http://schemas.openxmlformats.org/officeDocument/2006/relationships">
+  <p:cSld>
+    <p:spTree>
+      <p:nvGrpSpPr>
+        <p:cNvPr id="1" name=""/>
+        <p:cNvGrpSpPr/>
+        <p:nvPr/>
+      </p:nvGrpSpPr>
+      <p:grpSpPr/>
+      <p:pic>
+        <p:nvPicPr>
+          <p:cNvPr id="2" name="Picture 1" descr="redhat_logo.jpg"/>
+          <p:cNvPicPr>
+            <a:picLocks noChangeAspect="1"/>
+          </p:cNvPicPr>
+          <p:nvPr/>
+        </p:nvPicPr>
+        <p:blipFill>
+          <a:blip r:embed="rId2"/>
+          <a:stretch>
+            <a:fillRect/>
+          </a:stretch>
+        </p:blipFill>
+        <p:spPr>
+          <a:xfrm>
+            <a:off x="10326319" y="475488"/>
+            <a:ext cx="1024128" cy="242248"/>
+          </a:xfrm>
+          <a:prstGeom prst="rect">
+            <a:avLst/>
+          </a:prstGeom>
+        </p:spPr>
+      </p:pic>
+      <p:sp>
+        <p:nvSpPr>
+          <p:cNvPr id="3" name="TextBox 2"/>
+          <p:cNvSpPr txBox="1"/>
+          <p:nvPr/>
+        </p:nvSpPr>
+        <p:spPr>
+          <a:xfrm>
+            <a:off x="841248" y="548640"/>
+            <a:ext cx="8595360" cy="274320"/>
+          </a:xfrm>
+          <a:prstGeom prst="rect">
+            <a:avLst/>
+          </a:prstGeom>
+          <a:noFill/>
+        </p:spPr>
+        <p:txBody>
+          <a:bodyPr wrap="square" anchor="t" lIns="0" rIns="0" tIns="0" bIns="0">
+            <a:spAutoFit/>
+          </a:bodyPr>
+          <a:lstStyle/>
+          <a:p>
+            <a:pPr algn="l">
+              <a:lnSpc>
+                <a:spcPct val="106000"/>
+              </a:lnSpc>
+              <a:spcBef>
+                <a:spcPts val="0"/>
+              </a:spcBef>
+              <a:spcAft>
+                <a:spcPts val="0"/>
+              </a:spcAft>
+            </a:pPr>
+            <a:r>
+              <a:rPr sz="1250" b="1" spc="220">
+                <a:solidFill>
+                  <a:srgbClr val="EE0000"/>
+                </a:solidFill>
+                <a:latin typeface="Red Hat Display"/>
+              </a:rPr>
+              <a:t>M12 · DEVELOPER HUB &amp; GOLDEN PATHS</a:t>
+            </a:r>
+          </a:p>
+        </p:txBody>
+      </p:sp>
+      <p:sp>
+        <p:nvSpPr>
+          <p:cNvPr id="4" name="TextBox 3"/>
+          <p:cNvSpPr txBox="1"/>
+          <p:nvPr/>
+        </p:nvSpPr>
+        <p:spPr>
+          <a:xfrm>
+            <a:off x="841248" y="877824"/>
+            <a:ext cx="10515600" cy="548640"/>
+          </a:xfrm>
+          <a:prstGeom prst="rect">
+            <a:avLst/>
+          </a:prstGeom>
+          <a:noFill/>
+        </p:spPr>
+        <p:txBody>
+          <a:bodyPr wrap="none" anchor="t" lIns="0" rIns="0" tIns="0" bIns="0">
+            <a:spAutoFit/>
+          </a:bodyPr>
+          <a:lstStyle/>
+          <a:p>
+            <a:pPr algn="l">
+              <a:lnSpc>
+                <a:spcPct val="100000"/>
+              </a:lnSpc>
+              <a:spcBef>
+                <a:spcPts val="0"/>
+              </a:spcBef>
+              <a:spcAft>
+                <a:spcPts val="0"/>
+              </a:spcAft>
+            </a:pPr>
+            <a:r>
+              <a:rPr sz="2500" b="1">
+                <a:solidFill>
+                  <a:srgbClr val="1A1A1A"/>
+                </a:solidFill>
+                <a:latin typeface="Red Hat Display"/>
+              </a:rPr>
+              <a:t>Catalog model</a:t>
+            </a:r>
+          </a:p>
+        </p:txBody>
+      </p:sp>
+      <p:cxnSp>
+        <p:nvCxnSpPr>
+          <p:cNvPr id="5" name="Connector 4"/>
+          <p:cNvCxnSpPr/>
+          <p:nvPr/>
+        </p:nvCxnSpPr>
+        <p:spPr>
+          <a:xfrm>
+            <a:off x="841248" y="1554480"/>
+            <a:ext cx="1371600" cy="0"/>
+          </a:xfrm>
+          <a:prstGeom prst="bentConnector3">
+            <a:avLst/>
+          </a:prstGeom>
+          <a:ln w="31750">
+            <a:solidFill>
+              <a:srgbClr val="EE0000"/>
+            </a:solidFill>
+          </a:ln>
+          <a:effectLst/>
+        </p:spPr>
+        <p:style>
+          <a:lnRef idx="2">
+            <a:schemeClr val="accent1"/>
+          </a:lnRef>
+          <a:fillRef idx="0">
+            <a:schemeClr val="accent1"/>
+          </a:fillRef>
+          <a:effectRef idx="1">
+            <a:schemeClr val="accent1"/>
+          </a:effectRef>
+          <a:fontRef idx="minor">
+            <a:schemeClr val="tx1"/>
+          </a:fontRef>
+        </p:style>
+      </p:cxnSp>
+      <p:sp>
+        <p:nvSpPr>
+          <p:cNvPr id="6" name="Rounded Rectangle 5"/>
           <p:cNvSpPr/>
           <p:nvPr/>
         </p:nvSpPr>
         <p:spPr>
           <a:xfrm>
-            <a:off x="6812280" y="2395728"/>
-            <a:ext cx="4538167" cy="2944368"/>
+            <a:off x="841248" y="2331720"/>
+            <a:ext cx="10509199" cy="3794760"/>
           </a:xfrm>
           <a:prstGeom prst="roundRect">
             <a:avLst>
@@ -10340,169 +11553,33 @@
           </a:p>
         </p:txBody>
       </p:sp>
-      <p:sp>
-        <p:nvSpPr>
-          <p:cNvPr id="22" name="Rounded Rectangle 21"/>
-          <p:cNvSpPr/>
-          <p:nvPr/>
-        </p:nvSpPr>
-        <p:spPr>
-          <a:xfrm>
-            <a:off x="7013448" y="2596896"/>
-            <a:ext cx="1298448" cy="310896"/>
-          </a:xfrm>
-          <a:prstGeom prst="roundRect">
-            <a:avLst>
-              <a:gd name="adj" fmla="val 50000"/>
-            </a:avLst>
-          </a:prstGeom>
-          <a:solidFill>
-            <a:srgbClr val="FCECEC"/>
-          </a:solidFill>
-          <a:ln>
-            <a:noFill/>
-          </a:ln>
-          <a:effectLst/>
-        </p:spPr>
-        <p:style>
-          <a:lnRef idx="1">
-            <a:schemeClr val="accent1"/>
-          </a:lnRef>
-          <a:fillRef idx="3">
-            <a:schemeClr val="accent1"/>
-          </a:fillRef>
-          <a:effectRef idx="2">
-            <a:schemeClr val="accent1"/>
-          </a:effectRef>
-          <a:fontRef idx="minor">
-            <a:schemeClr val="lt1"/>
-          </a:fontRef>
-        </p:style>
-        <p:txBody>
-          <a:bodyPr rtlCol="0" anchor="ctr"/>
-          <a:lstStyle/>
-          <a:p>
-            <a:pPr algn="ctr"/>
-          </a:p>
-        </p:txBody>
-      </p:sp>
-      <p:sp>
-        <p:nvSpPr>
-          <p:cNvPr id="23" name="TextBox 22"/>
-          <p:cNvSpPr txBox="1"/>
-          <p:nvPr/>
-        </p:nvSpPr>
-        <p:spPr>
-          <a:xfrm>
-            <a:off x="7013448" y="2596896"/>
-            <a:ext cx="1298448" cy="310896"/>
-          </a:xfrm>
-          <a:prstGeom prst="rect">
-            <a:avLst/>
-          </a:prstGeom>
-          <a:noFill/>
-        </p:spPr>
-        <p:txBody>
-          <a:bodyPr wrap="none" anchor="ctr" lIns="0" rIns="0" tIns="0" bIns="0">
-            <a:spAutoFit/>
-          </a:bodyPr>
-          <a:lstStyle/>
-          <a:p>
-            <a:pPr algn="ctr">
-              <a:lnSpc>
-                <a:spcPct val="106000"/>
-              </a:lnSpc>
-              <a:spcBef>
-                <a:spcPts val="0"/>
-              </a:spcBef>
-              <a:spcAft>
-                <a:spcPts val="0"/>
-              </a:spcAft>
-            </a:pPr>
-            <a:r>
-              <a:rPr sz="850" b="1">
-                <a:solidFill>
-                  <a:srgbClr val="B80000"/>
-                </a:solidFill>
-                <a:latin typeface="Red Hat Display"/>
-              </a:rPr>
-              <a:t>MEDIA PASS</a:t>
-            </a:r>
-          </a:p>
-        </p:txBody>
-      </p:sp>
       <p:pic>
         <p:nvPicPr>
-          <p:cNvPr id="24" name="Picture 23" descr="eye_slate.png"/>
+          <p:cNvPr id="7" name="Picture 6" descr="01-catalog-model.png"/>
           <p:cNvPicPr>
             <a:picLocks noChangeAspect="1"/>
           </p:cNvPicPr>
           <p:nvPr/>
         </p:nvPicPr>
         <p:blipFill>
-          <a:blip r:embed="rId4"/>
+          <a:blip r:embed="rId3"/>
           <a:stretch>
             <a:fillRect/>
           </a:stretch>
         </p:blipFill>
         <p:spPr>
           <a:xfrm>
-            <a:off x="8843619" y="3108960"/>
-            <a:ext cx="475488" cy="475488"/>
+            <a:off x="3642014" y="2532888"/>
+            <a:ext cx="4907665" cy="3392424"/>
           </a:xfrm>
           <a:prstGeom prst="rect">
             <a:avLst/>
           </a:prstGeom>
         </p:spPr>
       </p:pic>
-      <p:sp>
-        <p:nvSpPr>
-          <p:cNvPr id="25" name="TextBox 24"/>
-          <p:cNvSpPr txBox="1"/>
-          <p:nvPr/>
-        </p:nvSpPr>
-        <p:spPr>
-          <a:xfrm>
-            <a:off x="7050024" y="3721608"/>
-            <a:ext cx="4062679" cy="1481328"/>
-          </a:xfrm>
-          <a:prstGeom prst="rect">
-            <a:avLst/>
-          </a:prstGeom>
-          <a:noFill/>
-        </p:spPr>
-        <p:txBody>
-          <a:bodyPr wrap="square" anchor="t" lIns="0" rIns="0" tIns="0" bIns="0">
-            <a:spAutoFit/>
-          </a:bodyPr>
-          <a:lstStyle/>
-          <a:p>
-            <a:pPr algn="l">
-              <a:lnSpc>
-                <a:spcPct val="120000"/>
-              </a:lnSpc>
-              <a:spcBef>
-                <a:spcPts val="0"/>
-              </a:spcBef>
-              <a:spcAft>
-                <a:spcPts val="0"/>
-              </a:spcAft>
-            </a:pPr>
-            <a:r>
-              <a:rPr sz="950" b="0">
-                <a:solidFill>
-                  <a:srgbClr val="8A9099"/>
-                </a:solidFill>
-                <a:latin typeface="Red Hat Text"/>
-              </a:rPr>
-              <a:t>Two-column "reach for it / don't" card; a small footnote strip pointing to the Build, Pipelines, Supply Chain, and GitOps modules whose decisions the golden path encodes.</a:t>
-            </a:r>
-          </a:p>
-        </p:txBody>
-      </p:sp>
       <p:cxnSp>
         <p:nvCxnSpPr>
-          <p:cNvPr id="26" name="Connector 25"/>
+          <p:cNvPr id="8" name="Connector 7"/>
           <p:cNvCxnSpPr/>
           <p:nvPr/>
         </p:nvCxnSpPr>
@@ -10538,7 +11615,7 @@
       </p:cxnSp>
       <p:sp>
         <p:nvSpPr>
-          <p:cNvPr id="27" name="TextBox 26"/>
+          <p:cNvPr id="9" name="TextBox 8"/>
           <p:cNvSpPr txBox="1"/>
           <p:nvPr/>
         </p:nvSpPr>
@@ -10583,7 +11660,7 @@
       </p:sp>
       <p:sp>
         <p:nvSpPr>
-          <p:cNvPr id="28" name="TextBox 27"/>
+          <p:cNvPr id="10" name="TextBox 9"/>
           <p:cNvSpPr txBox="1"/>
           <p:nvPr/>
         </p:nvSpPr>
@@ -10621,7 +11698,373 @@
                 </a:solidFill>
                 <a:latin typeface="Red Hat Text"/>
               </a:rPr>
-              <a:t>6</a:t>
+              <a:t>7</a:t>
+            </a:r>
+          </a:p>
+        </p:txBody>
+      </p:sp>
+    </p:spTree>
+  </p:cSld>
+  <p:clrMapOvr>
+    <a:masterClrMapping/>
+  </p:clrMapOvr>
+</p:sld>
+</file>
+
+<file path=ppt/slides/slide9.xml><?xml version="1.0" encoding="utf-8"?>
+<p:sld xmlns:a="http://schemas.openxmlformats.org/drawingml/2006/main" xmlns:p="http://schemas.openxmlformats.org/presentationml/2006/main" xmlns:r="http://schemas.openxmlformats.org/officeDocument/2006/relationships">
+  <p:cSld>
+    <p:spTree>
+      <p:nvGrpSpPr>
+        <p:cNvPr id="1" name=""/>
+        <p:cNvGrpSpPr/>
+        <p:nvPr/>
+      </p:nvGrpSpPr>
+      <p:grpSpPr/>
+      <p:pic>
+        <p:nvPicPr>
+          <p:cNvPr id="2" name="Picture 1" descr="redhat_logo.jpg"/>
+          <p:cNvPicPr>
+            <a:picLocks noChangeAspect="1"/>
+          </p:cNvPicPr>
+          <p:nvPr/>
+        </p:nvPicPr>
+        <p:blipFill>
+          <a:blip r:embed="rId2"/>
+          <a:stretch>
+            <a:fillRect/>
+          </a:stretch>
+        </p:blipFill>
+        <p:spPr>
+          <a:xfrm>
+            <a:off x="10326319" y="475488"/>
+            <a:ext cx="1024128" cy="242248"/>
+          </a:xfrm>
+          <a:prstGeom prst="rect">
+            <a:avLst/>
+          </a:prstGeom>
+        </p:spPr>
+      </p:pic>
+      <p:sp>
+        <p:nvSpPr>
+          <p:cNvPr id="3" name="TextBox 2"/>
+          <p:cNvSpPr txBox="1"/>
+          <p:nvPr/>
+        </p:nvSpPr>
+        <p:spPr>
+          <a:xfrm>
+            <a:off x="841248" y="548640"/>
+            <a:ext cx="8595360" cy="274320"/>
+          </a:xfrm>
+          <a:prstGeom prst="rect">
+            <a:avLst/>
+          </a:prstGeom>
+          <a:noFill/>
+        </p:spPr>
+        <p:txBody>
+          <a:bodyPr wrap="square" anchor="t" lIns="0" rIns="0" tIns="0" bIns="0">
+            <a:spAutoFit/>
+          </a:bodyPr>
+          <a:lstStyle/>
+          <a:p>
+            <a:pPr algn="l">
+              <a:lnSpc>
+                <a:spcPct val="106000"/>
+              </a:lnSpc>
+              <a:spcBef>
+                <a:spcPts val="0"/>
+              </a:spcBef>
+              <a:spcAft>
+                <a:spcPts val="0"/>
+              </a:spcAft>
+            </a:pPr>
+            <a:r>
+              <a:rPr sz="1250" b="1" spc="220">
+                <a:solidFill>
+                  <a:srgbClr val="EE0000"/>
+                </a:solidFill>
+                <a:latin typeface="Red Hat Display"/>
+              </a:rPr>
+              <a:t>M12 · DEVELOPER HUB &amp; GOLDEN PATHS</a:t>
+            </a:r>
+          </a:p>
+        </p:txBody>
+      </p:sp>
+      <p:sp>
+        <p:nvSpPr>
+          <p:cNvPr id="4" name="TextBox 3"/>
+          <p:cNvSpPr txBox="1"/>
+          <p:nvPr/>
+        </p:nvSpPr>
+        <p:spPr>
+          <a:xfrm>
+            <a:off x="841248" y="877824"/>
+            <a:ext cx="10515600" cy="548640"/>
+          </a:xfrm>
+          <a:prstGeom prst="rect">
+            <a:avLst/>
+          </a:prstGeom>
+          <a:noFill/>
+        </p:spPr>
+        <p:txBody>
+          <a:bodyPr wrap="none" anchor="t" lIns="0" rIns="0" tIns="0" bIns="0">
+            <a:spAutoFit/>
+          </a:bodyPr>
+          <a:lstStyle/>
+          <a:p>
+            <a:pPr algn="l">
+              <a:lnSpc>
+                <a:spcPct val="100000"/>
+              </a:lnSpc>
+              <a:spcBef>
+                <a:spcPts val="0"/>
+              </a:spcBef>
+              <a:spcAft>
+                <a:spcPts val="0"/>
+              </a:spcAft>
+            </a:pPr>
+            <a:r>
+              <a:rPr sz="2500" b="1">
+                <a:solidFill>
+                  <a:srgbClr val="1A1A1A"/>
+                </a:solidFill>
+                <a:latin typeface="Red Hat Display"/>
+              </a:rPr>
+              <a:t>Golden path flow</a:t>
+            </a:r>
+          </a:p>
+        </p:txBody>
+      </p:sp>
+      <p:cxnSp>
+        <p:nvCxnSpPr>
+          <p:cNvPr id="5" name="Connector 4"/>
+          <p:cNvCxnSpPr/>
+          <p:nvPr/>
+        </p:nvCxnSpPr>
+        <p:spPr>
+          <a:xfrm>
+            <a:off x="841248" y="1554480"/>
+            <a:ext cx="1371600" cy="0"/>
+          </a:xfrm>
+          <a:prstGeom prst="bentConnector3">
+            <a:avLst/>
+          </a:prstGeom>
+          <a:ln w="31750">
+            <a:solidFill>
+              <a:srgbClr val="EE0000"/>
+            </a:solidFill>
+          </a:ln>
+          <a:effectLst/>
+        </p:spPr>
+        <p:style>
+          <a:lnRef idx="2">
+            <a:schemeClr val="accent1"/>
+          </a:lnRef>
+          <a:fillRef idx="0">
+            <a:schemeClr val="accent1"/>
+          </a:fillRef>
+          <a:effectRef idx="1">
+            <a:schemeClr val="accent1"/>
+          </a:effectRef>
+          <a:fontRef idx="minor">
+            <a:schemeClr val="tx1"/>
+          </a:fontRef>
+        </p:style>
+      </p:cxnSp>
+      <p:sp>
+        <p:nvSpPr>
+          <p:cNvPr id="6" name="Rounded Rectangle 5"/>
+          <p:cNvSpPr/>
+          <p:nvPr/>
+        </p:nvSpPr>
+        <p:spPr>
+          <a:xfrm>
+            <a:off x="841248" y="2331720"/>
+            <a:ext cx="10509199" cy="3794760"/>
+          </a:xfrm>
+          <a:prstGeom prst="roundRect">
+            <a:avLst>
+              <a:gd name="adj" fmla="val 4000"/>
+            </a:avLst>
+          </a:prstGeom>
+          <a:solidFill>
+            <a:srgbClr val="FFFFFF"/>
+          </a:solidFill>
+          <a:ln w="15240">
+            <a:solidFill>
+              <a:srgbClr val="DDE1E6"/>
+            </a:solidFill>
+          </a:ln>
+          <a:effectLst/>
+        </p:spPr>
+        <p:style>
+          <a:lnRef idx="1">
+            <a:schemeClr val="accent1"/>
+          </a:lnRef>
+          <a:fillRef idx="3">
+            <a:schemeClr val="accent1"/>
+          </a:fillRef>
+          <a:effectRef idx="2">
+            <a:schemeClr val="accent1"/>
+          </a:effectRef>
+          <a:fontRef idx="minor">
+            <a:schemeClr val="lt1"/>
+          </a:fontRef>
+        </p:style>
+        <p:txBody>
+          <a:bodyPr rtlCol="0" anchor="ctr"/>
+          <a:lstStyle/>
+          <a:p>
+            <a:pPr algn="ctr"/>
+          </a:p>
+        </p:txBody>
+      </p:sp>
+      <p:pic>
+        <p:nvPicPr>
+          <p:cNvPr id="7" name="Picture 6" descr="02-golden-path-flow.png"/>
+          <p:cNvPicPr>
+            <a:picLocks noChangeAspect="1"/>
+          </p:cNvPicPr>
+          <p:nvPr/>
+        </p:nvPicPr>
+        <p:blipFill>
+          <a:blip r:embed="rId3"/>
+          <a:stretch>
+            <a:fillRect/>
+          </a:stretch>
+        </p:blipFill>
+        <p:spPr>
+          <a:xfrm>
+            <a:off x="1042416" y="2738337"/>
+            <a:ext cx="10106863" cy="2981524"/>
+          </a:xfrm>
+          <a:prstGeom prst="rect">
+            <a:avLst/>
+          </a:prstGeom>
+        </p:spPr>
+      </p:pic>
+      <p:cxnSp>
+        <p:nvCxnSpPr>
+          <p:cNvPr id="8" name="Connector 7"/>
+          <p:cNvCxnSpPr/>
+          <p:nvPr/>
+        </p:nvCxnSpPr>
+        <p:spPr>
+          <a:xfrm>
+            <a:off x="841248" y="6437376"/>
+            <a:ext cx="10509199" cy="0"/>
+          </a:xfrm>
+          <a:prstGeom prst="bentConnector3">
+            <a:avLst/>
+          </a:prstGeom>
+          <a:ln w="12700">
+            <a:solidFill>
+              <a:srgbClr val="DDE1E6"/>
+            </a:solidFill>
+          </a:ln>
+          <a:effectLst/>
+        </p:spPr>
+        <p:style>
+          <a:lnRef idx="2">
+            <a:schemeClr val="accent1"/>
+          </a:lnRef>
+          <a:fillRef idx="0">
+            <a:schemeClr val="accent1"/>
+          </a:fillRef>
+          <a:effectRef idx="1">
+            <a:schemeClr val="accent1"/>
+          </a:effectRef>
+          <a:fontRef idx="minor">
+            <a:schemeClr val="tx1"/>
+          </a:fontRef>
+        </p:style>
+      </p:cxnSp>
+      <p:sp>
+        <p:nvSpPr>
+          <p:cNvPr id="9" name="TextBox 8"/>
+          <p:cNvSpPr txBox="1"/>
+          <p:nvPr/>
+        </p:nvSpPr>
+        <p:spPr>
+          <a:xfrm>
+            <a:off x="841248" y="6473952"/>
+            <a:ext cx="7315200" cy="274320"/>
+          </a:xfrm>
+          <a:prstGeom prst="rect">
+            <a:avLst/>
+          </a:prstGeom>
+          <a:noFill/>
+        </p:spPr>
+        <p:txBody>
+          <a:bodyPr wrap="square" anchor="t" lIns="0" rIns="0" tIns="0" bIns="0">
+            <a:spAutoFit/>
+          </a:bodyPr>
+          <a:lstStyle/>
+          <a:p>
+            <a:pPr algn="l">
+              <a:lnSpc>
+                <a:spcPct val="106000"/>
+              </a:lnSpc>
+              <a:spcBef>
+                <a:spcPts val="0"/>
+              </a:spcBef>
+              <a:spcAft>
+                <a:spcPts val="0"/>
+              </a:spcAft>
+            </a:pPr>
+            <a:r>
+              <a:rPr sz="950" b="0">
+                <a:solidFill>
+                  <a:srgbClr val="8A9099"/>
+                </a:solidFill>
+                <a:latin typeface="Red Hat Text"/>
+              </a:rPr>
+              <a:t>CONFIDENTIAL</a:t>
+            </a:r>
+          </a:p>
+        </p:txBody>
+      </p:sp>
+      <p:sp>
+        <p:nvSpPr>
+          <p:cNvPr id="10" name="TextBox 9"/>
+          <p:cNvSpPr txBox="1"/>
+          <p:nvPr/>
+        </p:nvSpPr>
+        <p:spPr>
+          <a:xfrm>
+            <a:off x="10801807" y="6473952"/>
+            <a:ext cx="548640" cy="274320"/>
+          </a:xfrm>
+          <a:prstGeom prst="rect">
+            <a:avLst/>
+          </a:prstGeom>
+          <a:noFill/>
+        </p:spPr>
+        <p:txBody>
+          <a:bodyPr wrap="square" anchor="t" lIns="0" rIns="0" tIns="0" bIns="0">
+            <a:spAutoFit/>
+          </a:bodyPr>
+          <a:lstStyle/>
+          <a:p>
+            <a:pPr algn="r">
+              <a:lnSpc>
+                <a:spcPct val="106000"/>
+              </a:lnSpc>
+              <a:spcBef>
+                <a:spcPts val="0"/>
+              </a:spcBef>
+              <a:spcAft>
+                <a:spcPts val="0"/>
+              </a:spcAft>
+            </a:pPr>
+            <a:r>
+              <a:rPr sz="950" b="0">
+                <a:solidFill>
+                  <a:srgbClr val="8A9099"/>
+                </a:solidFill>
+                <a:latin typeface="Red Hat Text"/>
+              </a:rPr>
+              <a:t>8</a:t>
             </a:r>
           </a:p>
         </p:txBody>
